--- a/test_slide6.pptx
+++ b/test_slide6.pptx
@@ -4,8 +4,14 @@
   <p:sldMasterIdLst>
     <p:sldMasterId id="2147483648" r:id="rId1"/>
   </p:sldMasterIdLst>
+  <p:notesMasterIdLst>
+    <p:notesMasterId r:id="rId11"/>
+  </p:notesMasterIdLst>
+  <p:handoutMasterIdLst>
+    <p:handoutMasterId r:id="rId12"/>
+  </p:handoutMasterIdLst>
   <p:sldIdLst>
-    <p:sldId id="261" r:id="rId7"/>
+    <p:sldId id="261" r:id="rId8"/>
   </p:sldIdLst>
   <p:sldSz cx="9144000" cy="5149850"/>
   <p:notesSz cx="9144000" cy="5149850"/>
@@ -23,15 +29,509 @@
 </p188:authorLst>
 </file>
 
-<file path=ppt/revisionInfo.xml><?xml version="1.0" encoding="utf-8"?>
-<p1510:revInfo xmlns:a="http://schemas.openxmlformats.org/drawingml/2006/main" xmlns:r="http://schemas.openxmlformats.org/officeDocument/2006/relationships" xmlns:p1510="http://schemas.microsoft.com/office/powerpoint/2015/10/main">
-  <p1510:revLst>
-    <p1510:client id="{26906D0E-9BD2-ACC5-7B70-78C04C1F77A7}" v="501" dt="2026-03-04T09:33:56.880"/>
-    <p1510:client id="{5335BB3B-7617-F24F-B982-54B3BD0D77A8}" v="11" dt="2026-03-03T07:08:31.606"/>
-    <p1510:client id="{BE55ACF3-3FB2-0455-292C-E303511D8B27}" v="25" dt="2026-03-04T10:36:58.630"/>
-    <p1510:client id="{C3D552C4-EE90-8FE9-381E-0B16218B3DA5}" v="3" dt="2026-03-03T11:58:50.762"/>
-  </p1510:revLst>
-</p1510:revInfo>
+<file path=ppt/handoutMasters/handoutMaster1.xml><?xml version="1.0" encoding="utf-8"?>
+<p:handoutMaster xmlns:a="http://schemas.openxmlformats.org/drawingml/2006/main" xmlns:r="http://schemas.openxmlformats.org/officeDocument/2006/relationships" xmlns:p="http://schemas.openxmlformats.org/presentationml/2006/main">
+  <p:cSld>
+    <p:bg>
+      <p:bgRef idx="1001">
+        <a:schemeClr val="bg1"/>
+      </p:bgRef>
+    </p:bg>
+    <p:spTree>
+      <p:nvGrpSpPr>
+        <p:cNvPr id="1" name=""/>
+        <p:cNvGrpSpPr/>
+        <p:nvPr/>
+      </p:nvGrpSpPr>
+      <p:grpSpPr>
+        <a:xfrm>
+          <a:off x="0" y="0"/>
+          <a:ext cx="0" cy="0"/>
+          <a:chOff x="0" y="0"/>
+          <a:chExt cx="0" cy="0"/>
+        </a:xfrm>
+      </p:grpSpPr>
+      <p:sp>
+        <p:nvSpPr>
+          <p:cNvPr id="2" name="Header Placeholder 1"/>
+          <p:cNvSpPr>
+            <a:spLocks noGrp="1"/>
+          </p:cNvSpPr>
+          <p:nvPr>
+            <p:ph type="hdr" sz="quarter"/>
+          </p:nvPr>
+        </p:nvSpPr>
+        <p:spPr>
+          <a:xfrm>
+            <a:off x="0" y="0"/>
+            <a:ext cx="3962400" cy="258387"/>
+          </a:xfrm>
+          <a:prstGeom prst="rect">
+            <a:avLst/>
+          </a:prstGeom>
+        </p:spPr>
+        <p:txBody>
+          <a:bodyPr vert="horz" lIns="91440" tIns="45720" rIns="91440" bIns="45720" rtlCol="0"/>
+          <a:lstStyle>
+            <a:lvl1pPr algn="l">
+              <a:defRPr sz="675"/>
+            </a:lvl1pPr>
+          </a:lstStyle>
+          <a:p>
+            <a:endParaRPr lang="en-US"/>
+          </a:p>
+        </p:txBody>
+      </p:sp>
+      <p:sp>
+        <p:nvSpPr>
+          <p:cNvPr id="3" name="Date Placeholder 2"/>
+          <p:cNvSpPr>
+            <a:spLocks noGrp="1"/>
+          </p:cNvSpPr>
+          <p:nvPr>
+            <p:ph type="dt" sz="quarter" idx="1"/>
+          </p:nvPr>
+        </p:nvSpPr>
+        <p:spPr>
+          <a:xfrm>
+            <a:off x="5179484" y="0"/>
+            <a:ext cx="3962400" cy="258387"/>
+          </a:xfrm>
+          <a:prstGeom prst="rect">
+            <a:avLst/>
+          </a:prstGeom>
+        </p:spPr>
+        <p:txBody>
+          <a:bodyPr vert="horz" lIns="91440" tIns="45720" rIns="91440" bIns="45720" rtlCol="0"/>
+          <a:lstStyle>
+            <a:lvl1pPr algn="r">
+              <a:defRPr sz="675"/>
+            </a:lvl1pPr>
+          </a:lstStyle>
+          <a:p>
+            <a:fld id="{696C064A-D61B-4B21-B757-51A9B82445B8}" type="datetimeFigureOut">
+              <a:rPr lang="en-US" smtClean="0"/>
+            </a:fld>
+            <a:endParaRPr lang="en-US"/>
+          </a:p>
+        </p:txBody>
+      </p:sp>
+      <p:sp>
+        <p:nvSpPr>
+          <p:cNvPr id="4" name="Footer Placeholder 3"/>
+          <p:cNvSpPr>
+            <a:spLocks noGrp="1"/>
+          </p:cNvSpPr>
+          <p:nvPr>
+            <p:ph type="ftr" sz="quarter" idx="2"/>
+          </p:nvPr>
+        </p:nvSpPr>
+        <p:spPr>
+          <a:xfrm>
+            <a:off x="0" y="4891464"/>
+            <a:ext cx="3962400" cy="258386"/>
+          </a:xfrm>
+          <a:prstGeom prst="rect">
+            <a:avLst/>
+          </a:prstGeom>
+        </p:spPr>
+        <p:txBody>
+          <a:bodyPr vert="horz" lIns="91440" tIns="45720" rIns="91440" bIns="45720" rtlCol="0" anchor="b"/>
+          <a:lstStyle>
+            <a:lvl1pPr algn="l">
+              <a:defRPr sz="675"/>
+            </a:lvl1pPr>
+          </a:lstStyle>
+          <a:p>
+            <a:endParaRPr lang="en-US"/>
+          </a:p>
+        </p:txBody>
+      </p:sp>
+      <p:sp>
+        <p:nvSpPr>
+          <p:cNvPr id="5" name="Slide Number Placeholder 4"/>
+          <p:cNvSpPr>
+            <a:spLocks noGrp="1"/>
+          </p:cNvSpPr>
+          <p:nvPr>
+            <p:ph type="sldNum" sz="quarter" idx="3"/>
+          </p:nvPr>
+        </p:nvSpPr>
+        <p:spPr>
+          <a:xfrm>
+            <a:off x="5179484" y="4891464"/>
+            <a:ext cx="3962400" cy="258386"/>
+          </a:xfrm>
+          <a:prstGeom prst="rect">
+            <a:avLst/>
+          </a:prstGeom>
+        </p:spPr>
+        <p:txBody>
+          <a:bodyPr vert="horz" lIns="91440" tIns="45720" rIns="91440" bIns="45720" rtlCol="0" anchor="b"/>
+          <a:lstStyle>
+            <a:lvl1pPr algn="r">
+              <a:defRPr sz="675"/>
+            </a:lvl1pPr>
+          </a:lstStyle>
+          <a:p>
+            <a:fld id="{50305E07-67EA-4042-A3F6-853A8AD8D209}" type="slidenum">
+              <a:rPr lang="en-US" smtClean="0"/>
+            </a:fld>
+            <a:endParaRPr lang="en-US"/>
+          </a:p>
+        </p:txBody>
+      </p:sp>
+    </p:spTree>
+  </p:cSld>
+  <p:clrMap bg1="lt1" tx1="dk1" bg2="lt2" tx2="dk2" accent1="accent1" accent2="accent2" accent3="accent3" accent4="accent4" accent5="accent5" accent6="accent6" hlink="hlink" folHlink="folHlink"/>
+</p:handoutMaster>
+</file>
+
+<file path=ppt/notesMasters/notesMaster1.xml><?xml version="1.0" encoding="utf-8"?>
+<p:notesMaster xmlns:a="http://schemas.openxmlformats.org/drawingml/2006/main" xmlns:r="http://schemas.openxmlformats.org/officeDocument/2006/relationships" xmlns:p="http://schemas.openxmlformats.org/presentationml/2006/main">
+  <p:cSld>
+    <p:bg>
+      <p:bgRef idx="1001">
+        <a:schemeClr val="bg1"/>
+      </p:bgRef>
+    </p:bg>
+    <p:spTree>
+      <p:nvGrpSpPr>
+        <p:cNvPr id="1" name=""/>
+        <p:cNvGrpSpPr/>
+        <p:nvPr/>
+      </p:nvGrpSpPr>
+      <p:grpSpPr>
+        <a:xfrm>
+          <a:off x="0" y="0"/>
+          <a:ext cx="0" cy="0"/>
+          <a:chOff x="0" y="0"/>
+          <a:chExt cx="0" cy="0"/>
+        </a:xfrm>
+      </p:grpSpPr>
+      <p:sp>
+        <p:nvSpPr>
+          <p:cNvPr id="2" name="Header Placeholder 1"/>
+          <p:cNvSpPr>
+            <a:spLocks noGrp="1"/>
+          </p:cNvSpPr>
+          <p:nvPr>
+            <p:ph type="hdr" sz="quarter"/>
+          </p:nvPr>
+        </p:nvSpPr>
+        <p:spPr>
+          <a:xfrm>
+            <a:off x="0" y="0"/>
+            <a:ext cx="3962400" cy="258387"/>
+          </a:xfrm>
+          <a:prstGeom prst="rect">
+            <a:avLst/>
+          </a:prstGeom>
+        </p:spPr>
+        <p:txBody>
+          <a:bodyPr vert="horz" lIns="91440" tIns="45720" rIns="91440" bIns="45720" rtlCol="0"/>
+          <a:lstStyle>
+            <a:lvl1pPr algn="l">
+              <a:defRPr sz="1200"/>
+            </a:lvl1pPr>
+          </a:lstStyle>
+          <a:p>
+            <a:endParaRPr lang="en-US"/>
+          </a:p>
+        </p:txBody>
+      </p:sp>
+      <p:sp>
+        <p:nvSpPr>
+          <p:cNvPr id="3" name="Date Placeholder 2"/>
+          <p:cNvSpPr>
+            <a:spLocks noGrp="1"/>
+          </p:cNvSpPr>
+          <p:nvPr>
+            <p:ph type="dt" idx="1"/>
+          </p:nvPr>
+        </p:nvSpPr>
+        <p:spPr>
+          <a:xfrm>
+            <a:off x="5179484" y="0"/>
+            <a:ext cx="3962400" cy="258387"/>
+          </a:xfrm>
+          <a:prstGeom prst="rect">
+            <a:avLst/>
+          </a:prstGeom>
+        </p:spPr>
+        <p:txBody>
+          <a:bodyPr vert="horz" lIns="91440" tIns="45720" rIns="91440" bIns="45720" rtlCol="0"/>
+          <a:lstStyle>
+            <a:lvl1pPr algn="r">
+              <a:defRPr sz="1200"/>
+            </a:lvl1pPr>
+          </a:lstStyle>
+          <a:p>
+            <a:fld id="{3EFD42F7-718C-4B98-AAEC-167E6DDD60A7}" type="datetimeFigureOut">
+              <a:rPr lang="en-US" smtClean="0"/>
+            </a:fld>
+            <a:endParaRPr lang="en-US"/>
+          </a:p>
+        </p:txBody>
+      </p:sp>
+      <p:sp>
+        <p:nvSpPr>
+          <p:cNvPr id="4" name="Slide Image Placeholder 3"/>
+          <p:cNvSpPr>
+            <a:spLocks noGrp="1" noRot="1" noChangeAspect="1"/>
+          </p:cNvSpPr>
+          <p:nvPr>
+            <p:ph type="sldImg" idx="2"/>
+          </p:nvPr>
+        </p:nvSpPr>
+        <p:spPr>
+          <a:xfrm>
+            <a:off x="3027045" y="643731"/>
+            <a:ext cx="3089910" cy="1738074"/>
+          </a:xfrm>
+          <a:prstGeom prst="rect">
+            <a:avLst/>
+          </a:prstGeom>
+          <a:noFill/>
+          <a:ln w="12700">
+            <a:solidFill>
+              <a:prstClr val="black"/>
+            </a:solidFill>
+          </a:ln>
+        </p:spPr>
+        <p:txBody>
+          <a:bodyPr vert="horz" lIns="91440" tIns="45720" rIns="91440" bIns="45720" rtlCol="0" anchor="ctr"/>
+          <a:lstStyle/>
+          <a:p>
+            <a:endParaRPr lang="en-US"/>
+          </a:p>
+        </p:txBody>
+      </p:sp>
+      <p:sp>
+        <p:nvSpPr>
+          <p:cNvPr id="5" name="Notes Placeholder 4"/>
+          <p:cNvSpPr>
+            <a:spLocks noGrp="1"/>
+          </p:cNvSpPr>
+          <p:nvPr>
+            <p:ph type="body" sz="quarter" idx="3"/>
+          </p:nvPr>
+        </p:nvSpPr>
+        <p:spPr>
+          <a:xfrm>
+            <a:off x="914400" y="2478365"/>
+            <a:ext cx="7315200" cy="2027753"/>
+          </a:xfrm>
+          <a:prstGeom prst="rect">
+            <a:avLst/>
+          </a:prstGeom>
+        </p:spPr>
+        <p:txBody>
+          <a:bodyPr vert="horz" lIns="91440" tIns="45720" rIns="91440" bIns="45720" rtlCol="0"/>
+          <a:lstStyle/>
+          <a:p>
+            <a:pPr lvl="0"/>
+            <a:r>
+              <a:rPr lang="en-US" smtClean="0"/>
+              <a:t>Click to edit Master text styles</a:t>
+            </a:r>
+            <a:endParaRPr lang="en-US" smtClean="0"/>
+          </a:p>
+          <a:p>
+            <a:pPr lvl="1"/>
+            <a:r>
+              <a:rPr lang="en-US" smtClean="0"/>
+              <a:t>Second level</a:t>
+            </a:r>
+            <a:endParaRPr lang="en-US" smtClean="0"/>
+          </a:p>
+          <a:p>
+            <a:pPr lvl="2"/>
+            <a:r>
+              <a:rPr lang="en-US" smtClean="0"/>
+              <a:t>Third level</a:t>
+            </a:r>
+            <a:endParaRPr lang="en-US" smtClean="0"/>
+          </a:p>
+          <a:p>
+            <a:pPr lvl="3"/>
+            <a:r>
+              <a:rPr lang="en-US" smtClean="0"/>
+              <a:t>Fourth level</a:t>
+            </a:r>
+            <a:endParaRPr lang="en-US" smtClean="0"/>
+          </a:p>
+          <a:p>
+            <a:pPr lvl="4"/>
+            <a:r>
+              <a:rPr lang="en-US" smtClean="0"/>
+              <a:t>Fifth level</a:t>
+            </a:r>
+            <a:endParaRPr lang="en-US"/>
+          </a:p>
+        </p:txBody>
+      </p:sp>
+      <p:sp>
+        <p:nvSpPr>
+          <p:cNvPr id="6" name="Footer Placeholder 5"/>
+          <p:cNvSpPr>
+            <a:spLocks noGrp="1"/>
+          </p:cNvSpPr>
+          <p:nvPr>
+            <p:ph type="ftr" sz="quarter" idx="4"/>
+          </p:nvPr>
+        </p:nvSpPr>
+        <p:spPr>
+          <a:xfrm>
+            <a:off x="0" y="4891464"/>
+            <a:ext cx="3962400" cy="258386"/>
+          </a:xfrm>
+          <a:prstGeom prst="rect">
+            <a:avLst/>
+          </a:prstGeom>
+        </p:spPr>
+        <p:txBody>
+          <a:bodyPr vert="horz" lIns="91440" tIns="45720" rIns="91440" bIns="45720" rtlCol="0" anchor="b"/>
+          <a:lstStyle>
+            <a:lvl1pPr algn="l">
+              <a:defRPr sz="1200"/>
+            </a:lvl1pPr>
+          </a:lstStyle>
+          <a:p>
+            <a:endParaRPr lang="en-US"/>
+          </a:p>
+        </p:txBody>
+      </p:sp>
+      <p:sp>
+        <p:nvSpPr>
+          <p:cNvPr id="7" name="Slide Number Placeholder 6"/>
+          <p:cNvSpPr>
+            <a:spLocks noGrp="1"/>
+          </p:cNvSpPr>
+          <p:nvPr>
+            <p:ph type="sldNum" sz="quarter" idx="5"/>
+          </p:nvPr>
+        </p:nvSpPr>
+        <p:spPr>
+          <a:xfrm>
+            <a:off x="5179484" y="4891464"/>
+            <a:ext cx="3962400" cy="258386"/>
+          </a:xfrm>
+          <a:prstGeom prst="rect">
+            <a:avLst/>
+          </a:prstGeom>
+        </p:spPr>
+        <p:txBody>
+          <a:bodyPr vert="horz" lIns="91440" tIns="45720" rIns="91440" bIns="45720" rtlCol="0" anchor="b"/>
+          <a:lstStyle>
+            <a:lvl1pPr algn="r">
+              <a:defRPr sz="1200"/>
+            </a:lvl1pPr>
+          </a:lstStyle>
+          <a:p>
+            <a:fld id="{21B2AA4F-B828-4D7C-AFD3-893933DAFCB4}" type="slidenum">
+              <a:rPr lang="en-US" smtClean="0"/>
+            </a:fld>
+            <a:endParaRPr lang="en-US"/>
+          </a:p>
+        </p:txBody>
+      </p:sp>
+    </p:spTree>
+  </p:cSld>
+  <p:clrMap bg1="lt1" tx1="dk1" bg2="lt2" tx2="dk2" accent1="accent1" accent2="accent2" accent3="accent3" accent4="accent4" accent5="accent5" accent6="accent6" hlink="hlink" folHlink="folHlink"/>
+  <p:notesStyle>
+    <a:lvl1pPr marL="0" algn="l" defTabSz="914400" rtl="0" eaLnBrk="1" latinLnBrk="0" hangingPunct="1">
+      <a:defRPr sz="1200" kern="1200">
+        <a:solidFill>
+          <a:schemeClr val="tx1"/>
+        </a:solidFill>
+        <a:latin typeface="+mn-lt"/>
+        <a:ea typeface="+mn-ea"/>
+        <a:cs typeface="+mn-cs"/>
+      </a:defRPr>
+    </a:lvl1pPr>
+    <a:lvl2pPr marL="457200" algn="l" defTabSz="914400" rtl="0" eaLnBrk="1" latinLnBrk="0" hangingPunct="1">
+      <a:defRPr sz="1200" kern="1200">
+        <a:solidFill>
+          <a:schemeClr val="tx1"/>
+        </a:solidFill>
+        <a:latin typeface="+mn-lt"/>
+        <a:ea typeface="+mn-ea"/>
+        <a:cs typeface="+mn-cs"/>
+      </a:defRPr>
+    </a:lvl2pPr>
+    <a:lvl3pPr marL="914400" algn="l" defTabSz="914400" rtl="0" eaLnBrk="1" latinLnBrk="0" hangingPunct="1">
+      <a:defRPr sz="1200" kern="1200">
+        <a:solidFill>
+          <a:schemeClr val="tx1"/>
+        </a:solidFill>
+        <a:latin typeface="+mn-lt"/>
+        <a:ea typeface="+mn-ea"/>
+        <a:cs typeface="+mn-cs"/>
+      </a:defRPr>
+    </a:lvl3pPr>
+    <a:lvl4pPr marL="1371600" algn="l" defTabSz="914400" rtl="0" eaLnBrk="1" latinLnBrk="0" hangingPunct="1">
+      <a:defRPr sz="1200" kern="1200">
+        <a:solidFill>
+          <a:schemeClr val="tx1"/>
+        </a:solidFill>
+        <a:latin typeface="+mn-lt"/>
+        <a:ea typeface="+mn-ea"/>
+        <a:cs typeface="+mn-cs"/>
+      </a:defRPr>
+    </a:lvl4pPr>
+    <a:lvl5pPr marL="1828800" algn="l" defTabSz="914400" rtl="0" eaLnBrk="1" latinLnBrk="0" hangingPunct="1">
+      <a:defRPr sz="1200" kern="1200">
+        <a:solidFill>
+          <a:schemeClr val="tx1"/>
+        </a:solidFill>
+        <a:latin typeface="+mn-lt"/>
+        <a:ea typeface="+mn-ea"/>
+        <a:cs typeface="+mn-cs"/>
+      </a:defRPr>
+    </a:lvl5pPr>
+    <a:lvl6pPr marL="2286000" algn="l" defTabSz="914400" rtl="0" eaLnBrk="1" latinLnBrk="0" hangingPunct="1">
+      <a:defRPr sz="1200" kern="1200">
+        <a:solidFill>
+          <a:schemeClr val="tx1"/>
+        </a:solidFill>
+        <a:latin typeface="+mn-lt"/>
+        <a:ea typeface="+mn-ea"/>
+        <a:cs typeface="+mn-cs"/>
+      </a:defRPr>
+    </a:lvl6pPr>
+    <a:lvl7pPr marL="2743200" algn="l" defTabSz="914400" rtl="0" eaLnBrk="1" latinLnBrk="0" hangingPunct="1">
+      <a:defRPr sz="1200" kern="1200">
+        <a:solidFill>
+          <a:schemeClr val="tx1"/>
+        </a:solidFill>
+        <a:latin typeface="+mn-lt"/>
+        <a:ea typeface="+mn-ea"/>
+        <a:cs typeface="+mn-cs"/>
+      </a:defRPr>
+    </a:lvl7pPr>
+    <a:lvl8pPr marL="3200400" algn="l" defTabSz="914400" rtl="0" eaLnBrk="1" latinLnBrk="0" hangingPunct="1">
+      <a:defRPr sz="1200" kern="1200">
+        <a:solidFill>
+          <a:schemeClr val="tx1"/>
+        </a:solidFill>
+        <a:latin typeface="+mn-lt"/>
+        <a:ea typeface="+mn-ea"/>
+        <a:cs typeface="+mn-cs"/>
+      </a:defRPr>
+    </a:lvl8pPr>
+    <a:lvl9pPr marL="3657600" algn="l" defTabSz="914400" rtl="0" eaLnBrk="1" latinLnBrk="0" hangingPunct="1">
+      <a:defRPr sz="1200" kern="1200">
+        <a:solidFill>
+          <a:schemeClr val="tx1"/>
+        </a:solidFill>
+        <a:latin typeface="+mn-lt"/>
+        <a:ea typeface="+mn-ea"/>
+        <a:cs typeface="+mn-cs"/>
+      </a:defRPr>
+    </a:lvl9pPr>
+  </p:notesStyle>
+</p:notesMaster>
 </file>
 
 <file path=ppt/slideLayouts/slideLayout1.xml><?xml version="1.0" encoding="utf-8"?>
@@ -80,14 +580,12 @@
                 <a:solidFill>
                   <a:srgbClr val="1E3989"/>
                 </a:solidFill>
-                <a:latin typeface="Trebuchet MS"/>
-                <a:cs typeface="Trebuchet MS"/>
+                <a:latin typeface="Trebuchet MS" panose="020B0603020202020204"/>
+                <a:cs typeface="Trebuchet MS" panose="020B0603020202020204"/>
               </a:defRPr>
             </a:lvl1pPr>
           </a:lstStyle>
-          <a:p>
-            <a:endParaRPr/>
-          </a:p>
+          <a:p/>
         </p:txBody>
       </p:sp>
       <p:sp>
@@ -119,14 +617,12 @@
                 <a:solidFill>
                   <a:srgbClr val="334154"/>
                 </a:solidFill>
-                <a:latin typeface="Trebuchet MS"/>
-                <a:cs typeface="Trebuchet MS"/>
+                <a:latin typeface="Trebuchet MS" panose="020B0603020202020204"/>
+                <a:cs typeface="Trebuchet MS" panose="020B0603020202020204"/>
               </a:defRPr>
             </a:lvl1pPr>
           </a:lstStyle>
-          <a:p>
-            <a:endParaRPr/>
-          </a:p>
+          <a:p/>
         </p:txBody>
       </p:sp>
       <p:sp>
@@ -153,9 +649,7 @@
               </a:defRPr>
             </a:lvl1pPr>
           </a:lstStyle>
-          <a:p>
-            <a:endParaRPr/>
-          </a:p>
+          <a:p/>
         </p:txBody>
       </p:sp>
       <p:sp>
@@ -185,7 +679,6 @@
           <a:p>
             <a:fld id="{1D8BD707-D9CF-40AE-B4C6-C98DA3205C09}" type="datetimeFigureOut">
               <a:rPr lang="en-US"/>
-              <a:t>3/28/2026</a:t>
             </a:fld>
             <a:endParaRPr lang="en-US"/>
           </a:p>
@@ -217,7 +710,7 @@
           </a:lstStyle>
           <a:p>
             <a:fld id="{B6F15528-21DE-4FAA-801E-634DDDAF4B2B}" type="slidenum">
-              <a:t>‹#›</a:t>
+              <a:rPr/>
             </a:fld>
             <a:endParaRPr/>
           </a:p>
@@ -267,14 +760,12 @@
                 <a:solidFill>
                   <a:srgbClr val="1E3989"/>
                 </a:solidFill>
-                <a:latin typeface="Trebuchet MS"/>
-                <a:cs typeface="Trebuchet MS"/>
+                <a:latin typeface="Trebuchet MS" panose="020B0603020202020204"/>
+                <a:cs typeface="Trebuchet MS" panose="020B0603020202020204"/>
               </a:defRPr>
             </a:lvl1pPr>
           </a:lstStyle>
-          <a:p>
-            <a:endParaRPr/>
-          </a:p>
+          <a:p/>
         </p:txBody>
       </p:sp>
       <p:sp>
@@ -296,14 +787,12 @@
                 <a:solidFill>
                   <a:srgbClr val="334154"/>
                 </a:solidFill>
-                <a:latin typeface="Trebuchet MS"/>
-                <a:cs typeface="Trebuchet MS"/>
+                <a:latin typeface="Trebuchet MS" panose="020B0603020202020204"/>
+                <a:cs typeface="Trebuchet MS" panose="020B0603020202020204"/>
               </a:defRPr>
             </a:lvl1pPr>
           </a:lstStyle>
-          <a:p>
-            <a:endParaRPr/>
-          </a:p>
+          <a:p/>
         </p:txBody>
       </p:sp>
       <p:sp>
@@ -330,9 +819,7 @@
               </a:defRPr>
             </a:lvl1pPr>
           </a:lstStyle>
-          <a:p>
-            <a:endParaRPr/>
-          </a:p>
+          <a:p/>
         </p:txBody>
       </p:sp>
       <p:sp>
@@ -362,7 +849,6 @@
           <a:p>
             <a:fld id="{1D8BD707-D9CF-40AE-B4C6-C98DA3205C09}" type="datetimeFigureOut">
               <a:rPr lang="en-US"/>
-              <a:t>3/28/2026</a:t>
             </a:fld>
             <a:endParaRPr lang="en-US"/>
           </a:p>
@@ -394,7 +880,7 @@
           </a:lstStyle>
           <a:p>
             <a:fld id="{B6F15528-21DE-4FAA-801E-634DDDAF4B2B}" type="slidenum">
-              <a:t>‹#›</a:t>
+              <a:rPr/>
             </a:fld>
             <a:endParaRPr/>
           </a:p>
@@ -444,14 +930,12 @@
                 <a:solidFill>
                   <a:srgbClr val="1E3989"/>
                 </a:solidFill>
-                <a:latin typeface="Trebuchet MS"/>
-                <a:cs typeface="Trebuchet MS"/>
+                <a:latin typeface="Trebuchet MS" panose="020B0603020202020204"/>
+                <a:cs typeface="Trebuchet MS" panose="020B0603020202020204"/>
               </a:defRPr>
             </a:lvl1pPr>
           </a:lstStyle>
-          <a:p>
-            <a:endParaRPr/>
-          </a:p>
+          <a:p/>
         </p:txBody>
       </p:sp>
       <p:sp>
@@ -482,9 +966,7 @@
               <a:defRPr/>
             </a:lvl1pPr>
           </a:lstStyle>
-          <a:p>
-            <a:endParaRPr/>
-          </a:p>
+          <a:p/>
         </p:txBody>
       </p:sp>
       <p:sp>
@@ -515,9 +997,7 @@
               <a:defRPr/>
             </a:lvl1pPr>
           </a:lstStyle>
-          <a:p>
-            <a:endParaRPr/>
-          </a:p>
+          <a:p/>
         </p:txBody>
       </p:sp>
       <p:sp>
@@ -544,9 +1024,7 @@
               </a:defRPr>
             </a:lvl1pPr>
           </a:lstStyle>
-          <a:p>
-            <a:endParaRPr/>
-          </a:p>
+          <a:p/>
         </p:txBody>
       </p:sp>
       <p:sp>
@@ -576,7 +1054,6 @@
           <a:p>
             <a:fld id="{1D8BD707-D9CF-40AE-B4C6-C98DA3205C09}" type="datetimeFigureOut">
               <a:rPr lang="en-US"/>
-              <a:t>3/28/2026</a:t>
             </a:fld>
             <a:endParaRPr lang="en-US"/>
           </a:p>
@@ -608,7 +1085,7 @@
           </a:lstStyle>
           <a:p>
             <a:fld id="{B6F15528-21DE-4FAA-801E-634DDDAF4B2B}" type="slidenum">
-              <a:t>‹#›</a:t>
+              <a:rPr/>
             </a:fld>
             <a:endParaRPr/>
           </a:p>
@@ -658,14 +1135,12 @@
                 <a:solidFill>
                   <a:srgbClr val="1E3989"/>
                 </a:solidFill>
-                <a:latin typeface="Trebuchet MS"/>
-                <a:cs typeface="Trebuchet MS"/>
+                <a:latin typeface="Trebuchet MS" panose="020B0603020202020204"/>
+                <a:cs typeface="Trebuchet MS" panose="020B0603020202020204"/>
               </a:defRPr>
             </a:lvl1pPr>
           </a:lstStyle>
-          <a:p>
-            <a:endParaRPr/>
-          </a:p>
+          <a:p/>
         </p:txBody>
       </p:sp>
       <p:sp>
@@ -692,9 +1167,7 @@
               </a:defRPr>
             </a:lvl1pPr>
           </a:lstStyle>
-          <a:p>
-            <a:endParaRPr/>
-          </a:p>
+          <a:p/>
         </p:txBody>
       </p:sp>
       <p:sp>
@@ -724,7 +1197,6 @@
           <a:p>
             <a:fld id="{1D8BD707-D9CF-40AE-B4C6-C98DA3205C09}" type="datetimeFigureOut">
               <a:rPr lang="en-US"/>
-              <a:t>3/28/2026</a:t>
             </a:fld>
             <a:endParaRPr lang="en-US"/>
           </a:p>
@@ -756,7 +1228,7 @@
           </a:lstStyle>
           <a:p>
             <a:fld id="{B6F15528-21DE-4FAA-801E-634DDDAF4B2B}" type="slidenum">
-              <a:t>‹#›</a:t>
+              <a:rPr/>
             </a:fld>
             <a:endParaRPr/>
           </a:p>
@@ -811,9 +1283,7 @@
               </a:defRPr>
             </a:lvl1pPr>
           </a:lstStyle>
-          <a:p>
-            <a:endParaRPr/>
-          </a:p>
+          <a:p/>
         </p:txBody>
       </p:sp>
       <p:sp>
@@ -843,7 +1313,6 @@
           <a:p>
             <a:fld id="{1D8BD707-D9CF-40AE-B4C6-C98DA3205C09}" type="datetimeFigureOut">
               <a:rPr lang="en-US"/>
-              <a:t>3/28/2026</a:t>
             </a:fld>
             <a:endParaRPr lang="en-US"/>
           </a:p>
@@ -875,7 +1344,7 @@
           </a:lstStyle>
           <a:p>
             <a:fld id="{B6F15528-21DE-4FAA-801E-634DDDAF4B2B}" type="slidenum">
-              <a:t>‹#›</a:t>
+              <a:rPr/>
             </a:fld>
             <a:endParaRPr/>
           </a:p>
@@ -943,14 +1412,12 @@
                 <a:solidFill>
                   <a:srgbClr val="1E3989"/>
                 </a:solidFill>
-                <a:latin typeface="Trebuchet MS"/>
-                <a:cs typeface="Trebuchet MS"/>
+                <a:latin typeface="Trebuchet MS" panose="020B0603020202020204"/>
+                <a:cs typeface="Trebuchet MS" panose="020B0603020202020204"/>
               </a:defRPr>
             </a:lvl1pPr>
           </a:lstStyle>
-          <a:p>
-            <a:endParaRPr/>
-          </a:p>
+          <a:p/>
         </p:txBody>
       </p:sp>
       <p:sp>
@@ -982,14 +1449,12 @@
                 <a:solidFill>
                   <a:srgbClr val="334154"/>
                 </a:solidFill>
-                <a:latin typeface="Trebuchet MS"/>
-                <a:cs typeface="Trebuchet MS"/>
+                <a:latin typeface="Trebuchet MS" panose="020B0603020202020204"/>
+                <a:cs typeface="Trebuchet MS" panose="020B0603020202020204"/>
               </a:defRPr>
             </a:lvl1pPr>
           </a:lstStyle>
-          <a:p>
-            <a:endParaRPr/>
-          </a:p>
+          <a:p/>
         </p:txBody>
       </p:sp>
       <p:sp>
@@ -1026,9 +1491,7 @@
               </a:defRPr>
             </a:lvl1pPr>
           </a:lstStyle>
-          <a:p>
-            <a:endParaRPr/>
-          </a:p>
+          <a:p/>
         </p:txBody>
       </p:sp>
       <p:sp>
@@ -1068,7 +1531,6 @@
           <a:p>
             <a:fld id="{1D8BD707-D9CF-40AE-B4C6-C98DA3205C09}" type="datetimeFigureOut">
               <a:rPr lang="en-US"/>
-              <a:t>3/28/2026</a:t>
             </a:fld>
             <a:endParaRPr lang="en-US"/>
           </a:p>
@@ -1110,7 +1572,7 @@
           </a:lstStyle>
           <a:p>
             <a:fld id="{B6F15528-21DE-4FAA-801E-634DDDAF4B2B}" type="slidenum">
-              <a:t>‹#›</a:t>
+              <a:rPr/>
             </a:fld>
             <a:endParaRPr/>
           </a:p>
@@ -1120,11 +1582,11 @@
   </p:cSld>
   <p:clrMap bg1="lt1" tx1="dk1" bg2="lt2" tx2="dk2" accent1="accent1" accent2="accent2" accent3="accent3" accent4="accent4" accent5="accent5" accent6="accent6" hlink="hlink" folHlink="folHlink"/>
   <p:sldLayoutIdLst>
-    <p:sldLayoutId id="2147483661" r:id="rId1"/>
-    <p:sldLayoutId id="2147483662" r:id="rId2"/>
-    <p:sldLayoutId id="2147483663" r:id="rId3"/>
-    <p:sldLayoutId id="2147483664" r:id="rId4"/>
-    <p:sldLayoutId id="2147483665" r:id="rId5"/>
+    <p:sldLayoutId id="2147483649" r:id="rId1"/>
+    <p:sldLayoutId id="2147483650" r:id="rId2"/>
+    <p:sldLayoutId id="2147483651" r:id="rId3"/>
+    <p:sldLayoutId id="2147483652" r:id="rId4"/>
+    <p:sldLayoutId id="2147483653" r:id="rId5"/>
   </p:sldLayoutIdLst>
   <p:txStyles>
     <p:titleStyle>
@@ -1314,7 +1776,7 @@
           <a:p>
             <a:pPr marL="12700" marR="5080" algn="ctr">
               <a:lnSpc>
-                <a:spcPct val="100299"/>
+                <a:spcPct val="100000"/>
               </a:lnSpc>
               <a:spcBef>
                 <a:spcPts val="90"/>
@@ -1323,40 +1785,40 @@
             <a:br>
               <a:rPr lang="en-US" sz="3750" spc="120">
                 <a:latin typeface="Raleway" pitchFamily="2" charset="77"/>
-                <a:cs typeface="Times New Roman"/>
+                <a:cs typeface="Times New Roman" panose="02020603050405020304"/>
               </a:rPr>
             </a:br>
             <a:r>
               <a:rPr lang="en-US" sz="3750" spc="120">
                 <a:latin typeface="Raleway" pitchFamily="2" charset="77"/>
-                <a:cs typeface="Times New Roman"/>
+                <a:cs typeface="Times New Roman" panose="02020603050405020304"/>
               </a:rPr>
               <a:t>Econet Wireless P</a:t>
             </a:r>
             <a:r>
               <a:rPr lang="en-US" sz="3750" spc="55">
                 <a:latin typeface="Raleway" pitchFamily="2" charset="77"/>
-                <a:cs typeface="Times New Roman"/>
+                <a:cs typeface="Times New Roman" panose="02020603050405020304"/>
               </a:rPr>
               <a:t>erformance</a:t>
             </a:r>
             <a:r>
               <a:rPr sz="3750" spc="-270">
                 <a:latin typeface="Raleway" pitchFamily="2" charset="77"/>
-                <a:cs typeface="Times New Roman"/>
+                <a:cs typeface="Times New Roman" panose="02020603050405020304"/>
               </a:rPr>
               <a:t> </a:t>
             </a:r>
             <a:r>
               <a:rPr sz="3750" spc="45">
                 <a:latin typeface="Raleway" pitchFamily="2" charset="77"/>
-                <a:cs typeface="Times New Roman"/>
+                <a:cs typeface="Times New Roman" panose="02020603050405020304"/>
               </a:rPr>
               <a:t>Report</a:t>
             </a:r>
             <a:endParaRPr lang="en-US" sz="3750">
               <a:latin typeface="Raleway" pitchFamily="2" charset="77"/>
-              <a:cs typeface="Times New Roman"/>
+              <a:cs typeface="Times New Roman" panose="02020603050405020304"/>
             </a:endParaRPr>
           </a:p>
         </p:txBody>
@@ -1393,7 +1855,7 @@
                   <a:srgbClr val="334154"/>
                 </a:solidFill>
                 <a:latin typeface="Raleway" pitchFamily="2" charset="77"/>
-                <a:cs typeface="Times New Roman"/>
+                <a:cs typeface="Times New Roman" panose="02020603050405020304"/>
               </a:rPr>
               <a:t>Analysis</a:t>
             </a:r>
@@ -1403,7 +1865,7 @@
                   <a:srgbClr val="334154"/>
                 </a:solidFill>
                 <a:latin typeface="Raleway" pitchFamily="2" charset="77"/>
-                <a:cs typeface="Times New Roman"/>
+                <a:cs typeface="Times New Roman" panose="02020603050405020304"/>
               </a:rPr>
               <a:t> </a:t>
             </a:r>
@@ -1413,7 +1875,7 @@
                   <a:srgbClr val="334154"/>
                 </a:solidFill>
                 <a:latin typeface="Raleway" pitchFamily="2" charset="77"/>
-                <a:cs typeface="Times New Roman"/>
+                <a:cs typeface="Times New Roman" panose="02020603050405020304"/>
               </a:rPr>
               <a:t>&amp;</a:t>
             </a:r>
@@ -1423,7 +1885,7 @@
                   <a:srgbClr val="334154"/>
                 </a:solidFill>
                 <a:latin typeface="Raleway" pitchFamily="2" charset="77"/>
-                <a:cs typeface="Times New Roman"/>
+                <a:cs typeface="Times New Roman" panose="02020603050405020304"/>
               </a:rPr>
               <a:t> </a:t>
             </a:r>
@@ -1433,7 +1895,7 @@
                   <a:srgbClr val="334154"/>
                 </a:solidFill>
                 <a:latin typeface="Raleway" pitchFamily="2" charset="77"/>
-                <a:cs typeface="Times New Roman"/>
+                <a:cs typeface="Times New Roman" panose="02020603050405020304"/>
               </a:rPr>
               <a:t>Strategic </a:t>
             </a:r>
@@ -1443,13 +1905,13 @@
                   <a:srgbClr val="334154"/>
                 </a:solidFill>
                 <a:latin typeface="Raleway" pitchFamily="2" charset="77"/>
-                <a:cs typeface="Times New Roman"/>
+                <a:cs typeface="Times New Roman" panose="02020603050405020304"/>
               </a:rPr>
               <a:t>Insights</a:t>
             </a:r>
             <a:endParaRPr sz="1700">
               <a:latin typeface="Raleway" pitchFamily="2" charset="77"/>
-              <a:cs typeface="Times New Roman"/>
+              <a:cs typeface="Times New Roman" panose="02020603050405020304"/>
             </a:endParaRPr>
           </a:p>
         </p:txBody>
@@ -1461,7 +1923,7 @@
           <p:nvPr/>
         </p:nvPicPr>
         <p:blipFill>
-          <a:blip r:embed="rId2" cstate="print"/>
+          <a:blip r:embed="rId1" cstate="print"/>
           <a:stretch>
             <a:fillRect/>
           </a:stretch>
@@ -1485,7 +1947,7 @@
         <p:spPr>
           <a:xfrm>
             <a:off x="573699" y="4413180"/>
-            <a:ext cx="989817" cy="167995"/>
+            <a:ext cx="989817" cy="167640"/>
           </a:xfrm>
           <a:prstGeom prst="rect">
             <a:avLst/>
@@ -1511,9 +1973,9 @@
                   <a:srgbClr val="334154"/>
                 </a:solidFill>
                 <a:latin typeface="Raleway" pitchFamily="2" charset="77"/>
-                <a:cs typeface="Times New Roman"/>
-              </a:rPr>
-              <a:t>February</a:t>
+                <a:cs typeface="Times New Roman" panose="02020603050405020304"/>
+              </a:rPr>
+              <a:t>March</a:t>
             </a:r>
             <a:r>
               <a:rPr sz="1000" b="1" spc="-20">
@@ -1521,7 +1983,7 @@
                   <a:srgbClr val="334154"/>
                 </a:solidFill>
                 <a:latin typeface="Raleway" pitchFamily="2" charset="77"/>
-                <a:cs typeface="Times New Roman"/>
+                <a:cs typeface="Times New Roman" panose="02020603050405020304"/>
               </a:rPr>
               <a:t>,</a:t>
             </a:r>
@@ -1531,13 +1993,13 @@
                   <a:srgbClr val="334154"/>
                 </a:solidFill>
                 <a:latin typeface="Raleway" pitchFamily="2" charset="77"/>
-                <a:cs typeface="Times New Roman"/>
+                <a:cs typeface="Times New Roman" panose="02020603050405020304"/>
               </a:rPr>
               <a:t>2026</a:t>
             </a:r>
             <a:endParaRPr sz="1000">
               <a:latin typeface="Raleway" pitchFamily="2" charset="77"/>
-              <a:cs typeface="Times New Roman"/>
+              <a:cs typeface="Times New Roman" panose="02020603050405020304"/>
             </a:endParaRPr>
           </a:p>
         </p:txBody>
@@ -1604,7 +2066,7 @@
             <a:p>
               <a:endParaRPr>
                 <a:latin typeface="Raleway" pitchFamily="2" charset="77"/>
-                <a:cs typeface="Times New Roman"/>
+                <a:cs typeface="Times New Roman" panose="02020603050405020304"/>
               </a:endParaRPr>
             </a:p>
           </p:txBody>
@@ -1659,7 +2121,7 @@
             <a:p>
               <a:endParaRPr>
                 <a:latin typeface="Raleway" pitchFamily="2" charset="77"/>
-                <a:cs typeface="Times New Roman"/>
+                <a:cs typeface="Times New Roman" panose="02020603050405020304"/>
               </a:endParaRPr>
             </a:p>
           </p:txBody>
@@ -1714,7 +2176,7 @@
             <a:p>
               <a:endParaRPr>
                 <a:latin typeface="Raleway" pitchFamily="2" charset="77"/>
-                <a:cs typeface="Times New Roman"/>
+                <a:cs typeface="Times New Roman" panose="02020603050405020304"/>
               </a:endParaRPr>
             </a:p>
           </p:txBody>
@@ -1722,20 +2184,14 @@
       </p:grpSp>
       <p:pic>
         <p:nvPicPr>
-          <p:cNvPr id="12" name="Picture 11" descr="A white letters on a black background&#10;&#10;AI-generated content may be incorrect.">
-            <a:extLst>
-              <a:ext uri="{FF2B5EF4-FFF2-40B4-BE49-F238E27FC236}">
-                <a16:creationId xmlns:a16="http://schemas.microsoft.com/office/drawing/2014/main" id="{D9D37FD8-32B0-05B3-7CCC-BFE3C633FB1F}"/>
-              </a:ext>
-            </a:extLst>
-          </p:cNvPr>
+          <p:cNvPr id="12" name="Picture 11" descr="A white letters on a black background&#10;&#10;AI-generated content may be incorrect."/>
           <p:cNvPicPr>
             <a:picLocks noChangeAspect="1"/>
           </p:cNvPicPr>
           <p:nvPr/>
         </p:nvPicPr>
         <p:blipFill>
-          <a:blip r:embed="rId3"/>
+          <a:blip r:embed="rId2"/>
           <a:stretch>
             <a:fillRect/>
           </a:stretch>
@@ -1752,50 +2208,14 @@
       </p:pic>
       <p:pic>
         <p:nvPicPr>
-          <p:cNvPr id="10" name="Picture 9" descr="A graph showing the number of users&#10;&#10;AI-generated content may be incorrect.">
-            <a:extLst>
-              <a:ext uri="{FF2B5EF4-FFF2-40B4-BE49-F238E27FC236}">
-                <a16:creationId xmlns:a16="http://schemas.microsoft.com/office/drawing/2014/main" id="{592FAF51-6E8A-2B11-DB22-BE7C7D65C815}"/>
-              </a:ext>
-            </a:extLst>
-          </p:cNvPr>
+          <p:cNvPr id="15" name="Picture 14" descr="A blue and red logo&#10;&#10;AI-generated content may be incorrect."/>
           <p:cNvPicPr>
             <a:picLocks noChangeAspect="1"/>
           </p:cNvPicPr>
           <p:nvPr/>
         </p:nvPicPr>
         <p:blipFill>
-          <a:blip r:embed="rId4"/>
-          <a:stretch>
-            <a:fillRect/>
-          </a:stretch>
-        </p:blipFill>
-        <p:spPr>
-          <a:xfrm>
-            <a:off x="6017782" y="1805050"/>
-            <a:ext cx="2594835" cy="1538479"/>
-          </a:xfrm>
-          <a:prstGeom prst="rect">
-            <a:avLst/>
-          </a:prstGeom>
-        </p:spPr>
-      </p:pic>
-      <p:pic>
-        <p:nvPicPr>
-          <p:cNvPr id="15" name="Picture 14" descr="A blue and red logo&#10;&#10;AI-generated content may be incorrect.">
-            <a:extLst>
-              <a:ext uri="{FF2B5EF4-FFF2-40B4-BE49-F238E27FC236}">
-                <a16:creationId xmlns:a16="http://schemas.microsoft.com/office/drawing/2014/main" id="{228D0874-3B83-843B-B3EE-75654CB092BD}"/>
-              </a:ext>
-            </a:extLst>
-          </p:cNvPr>
-          <p:cNvPicPr>
-            <a:picLocks noChangeAspect="1"/>
-          </p:cNvPicPr>
-          <p:nvPr/>
-        </p:nvPicPr>
-        <p:blipFill>
-          <a:blip r:embed="rId5">
+          <a:blip r:embed="rId3">
             <a:extLst>
               <a:ext uri="{28A0092B-C50C-407E-A947-70E740481C1C}">
                 <a14:useLocalDpi xmlns:a14="http://schemas.microsoft.com/office/drawing/2010/main" val="0"/>
@@ -1810,6 +2230,30 @@
           <a:xfrm>
             <a:off x="0" y="0"/>
             <a:ext cx="1519767" cy="844315"/>
+          </a:xfrm>
+          <a:prstGeom prst="rect">
+            <a:avLst/>
+          </a:prstGeom>
+        </p:spPr>
+      </p:pic>
+      <p:pic>
+        <p:nvPicPr>
+          <p:cNvPr id="11" name="Picture 10" descr="Screenshot 2026-03-30 at 08.56.21"/>
+          <p:cNvPicPr>
+            <a:picLocks noChangeAspect="1"/>
+          </p:cNvPicPr>
+          <p:nvPr/>
+        </p:nvPicPr>
+        <p:blipFill>
+          <a:blip r:embed="rId4"/>
+          <a:stretch>
+            <a:fillRect/>
+          </a:stretch>
+        </p:blipFill>
+        <p:spPr>
+          <a:xfrm>
+            <a:off x="5977255" y="1883410"/>
+            <a:ext cx="2675255" cy="1513840"/>
           </a:xfrm>
           <a:prstGeom prst="rect">
             <a:avLst/>
@@ -1889,7 +2333,7 @@
           <a:p>
             <a:endParaRPr>
               <a:latin typeface="Raleway" pitchFamily="2" charset="77"/>
-              <a:cs typeface="Times New Roman"/>
+              <a:cs typeface="Times New Roman" panose="02020603050405020304"/>
             </a:endParaRPr>
           </a:p>
         </p:txBody>
@@ -1930,24 +2374,28 @@
             <a:r>
               <a:rPr>
                 <a:latin typeface="Raleway" pitchFamily="2" charset="77"/>
-                <a:cs typeface="Times New Roman"/>
+                <a:cs typeface="Times New Roman" panose="02020603050405020304"/>
               </a:rPr>
               <a:t>Executive</a:t>
             </a:r>
             <a:r>
               <a:rPr spc="125">
                 <a:latin typeface="Raleway" pitchFamily="2" charset="77"/>
-                <a:cs typeface="Times New Roman"/>
+                <a:cs typeface="Times New Roman" panose="02020603050405020304"/>
               </a:rPr>
               <a:t> </a:t>
             </a:r>
             <a:r>
               <a:rPr spc="75">
                 <a:latin typeface="Raleway" pitchFamily="2" charset="77"/>
-                <a:cs typeface="Times New Roman"/>
+                <a:cs typeface="Times New Roman" panose="02020603050405020304"/>
               </a:rPr>
               <a:t>Summary</a:t>
             </a:r>
+            <a:endParaRPr spc="75">
+              <a:latin typeface="Raleway" pitchFamily="2" charset="77"/>
+              <a:cs typeface="Times New Roman" panose="02020603050405020304"/>
+            </a:endParaRPr>
           </a:p>
         </p:txBody>
       </p:sp>
@@ -1986,7 +2434,7 @@
                   <a:srgbClr val="334154"/>
                 </a:solidFill>
                 <a:latin typeface="Raleway" pitchFamily="2" charset="77"/>
-                <a:cs typeface="Times New Roman"/>
+                <a:cs typeface="Times New Roman" panose="02020603050405020304"/>
               </a:rPr>
               <a:t>Performance</a:t>
             </a:r>
@@ -1996,7 +2444,7 @@
                   <a:srgbClr val="334154"/>
                 </a:solidFill>
                 <a:latin typeface="Raleway" pitchFamily="2" charset="77"/>
-                <a:cs typeface="Times New Roman"/>
+                <a:cs typeface="Times New Roman" panose="02020603050405020304"/>
               </a:rPr>
               <a:t> </a:t>
             </a:r>
@@ -2006,7 +2454,7 @@
                   <a:srgbClr val="334154"/>
                 </a:solidFill>
                 <a:latin typeface="Raleway" pitchFamily="2" charset="77"/>
-                <a:cs typeface="Times New Roman"/>
+                <a:cs typeface="Times New Roman" panose="02020603050405020304"/>
               </a:rPr>
               <a:t>Overview:</a:t>
             </a:r>
@@ -2016,7 +2464,7 @@
                   <a:srgbClr val="334154"/>
                 </a:solidFill>
                 <a:latin typeface="Raleway" pitchFamily="2" charset="77"/>
-                <a:cs typeface="Times New Roman"/>
+                <a:cs typeface="Times New Roman" panose="02020603050405020304"/>
               </a:rPr>
               <a:t> </a:t>
             </a:r>
@@ -2026,7 +2474,7 @@
                   <a:srgbClr val="334154"/>
                 </a:solidFill>
                 <a:latin typeface="Raleway" pitchFamily="2" charset="77"/>
-                <a:cs typeface="Times New Roman"/>
+                <a:cs typeface="Times New Roman" panose="02020603050405020304"/>
               </a:rPr>
               <a:t>Strong</a:t>
             </a:r>
@@ -2036,13 +2484,13 @@
                   <a:srgbClr val="334154"/>
                 </a:solidFill>
                 <a:latin typeface="Raleway" pitchFamily="2" charset="77"/>
-                <a:cs typeface="Times New Roman"/>
+                <a:cs typeface="Times New Roman" panose="02020603050405020304"/>
               </a:rPr>
               <a:t> proportion of first-time users</a:t>
             </a:r>
             <a:endParaRPr sz="1300">
               <a:latin typeface="Raleway" pitchFamily="2" charset="77"/>
-              <a:cs typeface="Times New Roman"/>
+              <a:cs typeface="Times New Roman" panose="02020603050405020304"/>
             </a:endParaRPr>
           </a:p>
         </p:txBody>
@@ -2109,7 +2557,7 @@
             <a:p>
               <a:endParaRPr>
                 <a:latin typeface="Raleway" pitchFamily="2" charset="77"/>
-                <a:cs typeface="Times New Roman"/>
+                <a:cs typeface="Times New Roman" panose="02020603050405020304"/>
               </a:endParaRPr>
             </a:p>
           </p:txBody>
@@ -2162,7 +2610,7 @@
             <a:p>
               <a:endParaRPr>
                 <a:latin typeface="Raleway" pitchFamily="2" charset="77"/>
-                <a:cs typeface="Times New Roman"/>
+                <a:cs typeface="Times New Roman" panose="02020603050405020304"/>
               </a:endParaRPr>
             </a:p>
           </p:txBody>
@@ -2181,7 +2629,7 @@
         <p:spPr>
           <a:xfrm>
             <a:off x="477579" y="1584910"/>
-            <a:ext cx="4122007" cy="2824748"/>
+            <a:ext cx="4122007" cy="2844165"/>
           </a:xfrm>
           <a:prstGeom prst="rect">
             <a:avLst/>
@@ -2194,68 +2642,77 @@
           <a:lstStyle/>
           <a:p>
             <a:r>
-              <a:rPr lang="en-ZW">
+              <a:rPr lang="en-US">
                 <a:latin typeface="Raleway" pitchFamily="2" charset="77"/>
               </a:rPr>
               <a:t>The Econet Wireless website delivered solid overall performance during the period under review, attracting </a:t>
             </a:r>
             <a:r>
-              <a:rPr lang="en-ZW" b="1">
-                <a:latin typeface="Raleway" pitchFamily="2" charset="77"/>
-              </a:rPr>
-              <a:t>34,000 active users</a:t>
-            </a:r>
-            <a:r>
-              <a:rPr lang="en-ZW">
+              <a:rPr lang="en-US" b="1">
+                <a:latin typeface="Raleway" pitchFamily="2" charset="77"/>
+              </a:rPr>
+              <a:t>27,000 active users</a:t>
+            </a:r>
+            <a:r>
+              <a:rPr lang="en-US">
                 <a:latin typeface="Raleway" pitchFamily="2" charset="77"/>
               </a:rPr>
               <a:t>, with </a:t>
             </a:r>
             <a:r>
-              <a:rPr lang="en-ZW" b="1">
-                <a:latin typeface="Raleway" pitchFamily="2" charset="77"/>
-              </a:rPr>
-              <a:t>94% being new visitors</a:t>
-            </a:r>
-            <a:r>
-              <a:rPr lang="en-ZW">
+              <a:rPr lang="en-US" b="1">
+                <a:latin typeface="Raleway" pitchFamily="2" charset="77"/>
+              </a:rPr>
+              <a:t>92.5% being new visitors</a:t>
+            </a:r>
+            <a:r>
+              <a:rPr lang="en-US">
                 <a:latin typeface="Raleway" pitchFamily="2" charset="77"/>
               </a:rPr>
               <a:t>. This strong proportion of first-time users reflects effective audience acquisition and sustained brand visibility across digital channels.</a:t>
             </a:r>
-          </a:p>
-          <a:p>
-            <a:r>
-              <a:rPr lang="en-ZW">
+            <a:endParaRPr lang="en-US">
+              <a:latin typeface="Raleway" pitchFamily="2" charset="77"/>
+            </a:endParaRPr>
+          </a:p>
+          <a:p>
+            <a:r>
+              <a:rPr lang="en-US">
                 <a:latin typeface="Raleway" pitchFamily="2" charset="77"/>
               </a:rPr>
               <a:t>From a search performance perspective, the platform achieved a </a:t>
             </a:r>
             <a:r>
-              <a:rPr lang="en-ZW" b="1">
-                <a:latin typeface="Raleway" pitchFamily="2" charset="77"/>
-              </a:rPr>
-              <a:t>3.1% click-through rate (CTR)</a:t>
-            </a:r>
-            <a:r>
-              <a:rPr lang="en-ZW">
+              <a:rPr lang="en-US" b="1">
+                <a:latin typeface="Raleway" pitchFamily="2" charset="77"/>
+              </a:rPr>
+              <a:t>6% click-through rate (CTR)</a:t>
+            </a:r>
+            <a:r>
+              <a:rPr lang="en-US">
                 <a:latin typeface="Raleway" pitchFamily="2" charset="77"/>
               </a:rPr>
               <a:t>. While moderate, this indicates that search listings are generating consistent traffic and converting visibility into visits, suggesting reasonable keyword alignment and search presence.</a:t>
             </a:r>
-          </a:p>
-          <a:p>
-            <a:r>
-              <a:rPr lang="en-ZW">
+            <a:endParaRPr lang="en-US">
+              <a:latin typeface="Raleway" pitchFamily="2" charset="77"/>
+            </a:endParaRPr>
+          </a:p>
+          <a:p>
+            <a:r>
+              <a:rPr lang="en-US">
                 <a:latin typeface="Raleway" pitchFamily="2" charset="77"/>
               </a:rPr>
               <a:t>The combination of high new-user acquisition and steady CTR performance signals continued external interest and strong discoverability. Overall, the website demonstrates a stable digital footprint driven by strong awareness metrics. The next optimisation focus can centre on improving engagement depth and converting this large influx of new visitors into repeat users and long-term brand loyalty.</a:t>
             </a:r>
+            <a:endParaRPr lang="en-US">
+              <a:latin typeface="Raleway" pitchFamily="2" charset="77"/>
+            </a:endParaRPr>
           </a:p>
           <a:p>
             <a:pPr marL="369570" marR="190500" indent="-169545" algn="just">
               <a:lnSpc>
-                <a:spcPct val="132300"/>
+                <a:spcPct val="132000"/>
               </a:lnSpc>
               <a:spcBef>
                 <a:spcPts val="100"/>
@@ -2268,7 +2725,7 @@
             </a:pPr>
             <a:endParaRPr lang="en-US" spc="-50">
               <a:latin typeface="Raleway" pitchFamily="2" charset="77"/>
-              <a:cs typeface="Times New Roman"/>
+              <a:cs typeface="Times New Roman" panose="02020603050405020304"/>
             </a:endParaRPr>
           </a:p>
         </p:txBody>
@@ -2282,7 +2739,7 @@
         <p:spPr>
           <a:xfrm>
             <a:off x="5354314" y="1533290"/>
-            <a:ext cx="2266249" cy="664284"/>
+            <a:ext cx="2266249" cy="666115"/>
           </a:xfrm>
           <a:prstGeom prst="rect">
             <a:avLst/>
@@ -2306,18 +2763,28 @@
               </a:spcBef>
             </a:pPr>
             <a:r>
+              <a:rPr lang="en-US" altLang="en-GB" b="1" spc="-25">
+                <a:solidFill>
+                  <a:srgbClr val="FFFFFF"/>
+                </a:solidFill>
+                <a:latin typeface="Raleway" pitchFamily="2" charset="77"/>
+                <a:cs typeface="Times New Roman" panose="02020603050405020304"/>
+              </a:rPr>
+              <a:t>27</a:t>
+            </a:r>
+            <a:r>
               <a:rPr lang="en-GB" b="1" spc="-25">
                 <a:solidFill>
                   <a:srgbClr val="FFFFFF"/>
                 </a:solidFill>
                 <a:latin typeface="Raleway" pitchFamily="2" charset="77"/>
-                <a:cs typeface="Times New Roman"/>
-              </a:rPr>
-              <a:t>34K</a:t>
+                <a:cs typeface="Times New Roman" panose="02020603050405020304"/>
+              </a:rPr>
+              <a:t>K</a:t>
             </a:r>
             <a:endParaRPr sz="1800">
               <a:latin typeface="Raleway" pitchFamily="2" charset="77"/>
-              <a:cs typeface="Times New Roman"/>
+              <a:cs typeface="Times New Roman" panose="02020603050405020304"/>
             </a:endParaRPr>
           </a:p>
           <a:p>
@@ -2335,7 +2802,7 @@
                   <a:srgbClr val="FFFFFF"/>
                 </a:solidFill>
                 <a:latin typeface="Raleway" pitchFamily="2" charset="77"/>
-                <a:cs typeface="Times New Roman"/>
+                <a:cs typeface="Times New Roman" panose="02020603050405020304"/>
               </a:rPr>
               <a:t>Active</a:t>
             </a:r>
@@ -2345,7 +2812,7 @@
                   <a:srgbClr val="FFFFFF"/>
                 </a:solidFill>
                 <a:latin typeface="Raleway" pitchFamily="2" charset="77"/>
-                <a:cs typeface="Times New Roman"/>
+                <a:cs typeface="Times New Roman" panose="02020603050405020304"/>
               </a:rPr>
               <a:t> </a:t>
             </a:r>
@@ -2355,13 +2822,13 @@
                   <a:srgbClr val="FFFFFF"/>
                 </a:solidFill>
                 <a:latin typeface="Raleway" pitchFamily="2" charset="77"/>
-                <a:cs typeface="Times New Roman"/>
+                <a:cs typeface="Times New Roman" panose="02020603050405020304"/>
               </a:rPr>
               <a:t>Users</a:t>
             </a:r>
             <a:endParaRPr sz="700">
               <a:latin typeface="Raleway" pitchFamily="2" charset="77"/>
-              <a:cs typeface="Times New Roman"/>
+              <a:cs typeface="Times New Roman" panose="02020603050405020304"/>
             </a:endParaRPr>
           </a:p>
         </p:txBody>
@@ -2375,7 +2842,7 @@
         <p:spPr>
           <a:xfrm>
             <a:off x="5354857" y="2490108"/>
-            <a:ext cx="2269646" cy="664284"/>
+            <a:ext cx="2269646" cy="666115"/>
           </a:xfrm>
           <a:prstGeom prst="rect">
             <a:avLst/>
@@ -2404,13 +2871,33 @@
                   <a:srgbClr val="FFFFFF"/>
                 </a:solidFill>
                 <a:latin typeface="Raleway" pitchFamily="2" charset="77"/>
-                <a:cs typeface="Times New Roman"/>
-              </a:rPr>
-              <a:t>94%</a:t>
+                <a:cs typeface="Times New Roman" panose="02020603050405020304"/>
+              </a:rPr>
+              <a:t>9</a:t>
+            </a:r>
+            <a:r>
+              <a:rPr lang="en-US" altLang="en-GB" b="1" spc="-10">
+                <a:solidFill>
+                  <a:srgbClr val="FFFFFF"/>
+                </a:solidFill>
+                <a:latin typeface="Raleway" pitchFamily="2" charset="77"/>
+                <a:cs typeface="Times New Roman" panose="02020603050405020304"/>
+              </a:rPr>
+              <a:t>2.5</a:t>
+            </a:r>
+            <a:r>
+              <a:rPr lang="en-GB" b="1" spc="-10">
+                <a:solidFill>
+                  <a:srgbClr val="FFFFFF"/>
+                </a:solidFill>
+                <a:latin typeface="Raleway" pitchFamily="2" charset="77"/>
+                <a:cs typeface="Times New Roman" panose="02020603050405020304"/>
+              </a:rPr>
+              <a:t>%</a:t>
             </a:r>
             <a:endParaRPr sz="1800">
               <a:latin typeface="Raleway" pitchFamily="2" charset="77"/>
-              <a:cs typeface="Times New Roman"/>
+              <a:cs typeface="Times New Roman" panose="02020603050405020304"/>
             </a:endParaRPr>
           </a:p>
           <a:p>
@@ -2428,7 +2915,7 @@
                   <a:srgbClr val="FFFFFF"/>
                 </a:solidFill>
                 <a:latin typeface="Raleway" pitchFamily="2" charset="77"/>
-                <a:cs typeface="Times New Roman"/>
+                <a:cs typeface="Times New Roman" panose="02020603050405020304"/>
               </a:rPr>
               <a:t>New</a:t>
             </a:r>
@@ -2438,7 +2925,7 @@
                   <a:srgbClr val="FFFFFF"/>
                 </a:solidFill>
                 <a:latin typeface="Raleway" pitchFamily="2" charset="77"/>
-                <a:cs typeface="Times New Roman"/>
+                <a:cs typeface="Times New Roman" panose="02020603050405020304"/>
               </a:rPr>
               <a:t> </a:t>
             </a:r>
@@ -2448,13 +2935,13 @@
                   <a:srgbClr val="FFFFFF"/>
                 </a:solidFill>
                 <a:latin typeface="Raleway" pitchFamily="2" charset="77"/>
-                <a:cs typeface="Times New Roman"/>
+                <a:cs typeface="Times New Roman" panose="02020603050405020304"/>
               </a:rPr>
               <a:t>Visitors</a:t>
             </a:r>
             <a:endParaRPr sz="700">
               <a:latin typeface="Raleway" pitchFamily="2" charset="77"/>
-              <a:cs typeface="Times New Roman"/>
+              <a:cs typeface="Times New Roman" panose="02020603050405020304"/>
             </a:endParaRPr>
           </a:p>
         </p:txBody>
@@ -2468,7 +2955,7 @@
         <p:spPr>
           <a:xfrm>
             <a:off x="5414354" y="3627469"/>
-            <a:ext cx="2269646" cy="664284"/>
+            <a:ext cx="2269646" cy="666115"/>
           </a:xfrm>
           <a:prstGeom prst="rect">
             <a:avLst/>
@@ -2492,14 +2979,14 @@
               </a:spcBef>
             </a:pPr>
             <a:r>
-              <a:rPr lang="en-GB" b="1" spc="-20">
+              <a:rPr lang="en-US" altLang="en-US" sz="1800" b="1" spc="-20">
                 <a:solidFill>
                   <a:srgbClr val="FFFFFF"/>
                 </a:solidFill>
                 <a:latin typeface="Raleway" pitchFamily="2" charset="77"/>
-                <a:cs typeface="Times New Roman"/>
-              </a:rPr>
-              <a:t>3.1</a:t>
+                <a:cs typeface="Times New Roman" panose="02020603050405020304"/>
+              </a:rPr>
+              <a:t>6</a:t>
             </a:r>
             <a:r>
               <a:rPr sz="1800" b="1" spc="-20">
@@ -2507,13 +2994,13 @@
                   <a:srgbClr val="FFFFFF"/>
                 </a:solidFill>
                 <a:latin typeface="Raleway" pitchFamily="2" charset="77"/>
-                <a:cs typeface="Times New Roman"/>
+                <a:cs typeface="Times New Roman" panose="02020603050405020304"/>
               </a:rPr>
               <a:t>%</a:t>
             </a:r>
             <a:endParaRPr sz="1800">
               <a:latin typeface="Raleway" pitchFamily="2" charset="77"/>
-              <a:cs typeface="Times New Roman"/>
+              <a:cs typeface="Times New Roman" panose="02020603050405020304"/>
             </a:endParaRPr>
           </a:p>
           <a:p>
@@ -2531,13 +3018,13 @@
                   <a:srgbClr val="FFFFFF"/>
                 </a:solidFill>
                 <a:latin typeface="Raleway" pitchFamily="2" charset="77"/>
-                <a:cs typeface="Times New Roman"/>
+                <a:cs typeface="Times New Roman" panose="02020603050405020304"/>
               </a:rPr>
               <a:t>CTR</a:t>
             </a:r>
             <a:endParaRPr sz="700">
               <a:latin typeface="Raleway" pitchFamily="2" charset="77"/>
-              <a:cs typeface="Times New Roman"/>
+              <a:cs typeface="Times New Roman" panose="02020603050405020304"/>
             </a:endParaRPr>
           </a:p>
         </p:txBody>
@@ -2578,6 +3065,10 @@
           </p:nvPr>
         </p:nvSpPr>
         <p:spPr>
+          <a:xfrm>
+            <a:off x="401612" y="165009"/>
+            <a:ext cx="4932464" cy="828040"/>
+          </a:xfrm>
           <a:prstGeom prst="rect">
             <a:avLst/>
           </a:prstGeom>
@@ -2599,21 +3090,21 @@
             <a:r>
               <a:rPr>
                 <a:latin typeface="Raleway" pitchFamily="2" charset="77"/>
-                <a:cs typeface="Times New Roman"/>
+                <a:cs typeface="Times New Roman" panose="02020603050405020304"/>
               </a:rPr>
               <a:t>Site</a:t>
             </a:r>
             <a:r>
               <a:rPr spc="40">
                 <a:latin typeface="Raleway" pitchFamily="2" charset="77"/>
-                <a:cs typeface="Times New Roman"/>
+                <a:cs typeface="Times New Roman" panose="02020603050405020304"/>
               </a:rPr>
               <a:t> </a:t>
             </a:r>
             <a:r>
               <a:rPr spc="-10">
                 <a:latin typeface="Raleway" pitchFamily="2" charset="77"/>
-                <a:cs typeface="Times New Roman"/>
+                <a:cs typeface="Times New Roman" panose="02020603050405020304"/>
               </a:rPr>
               <a:t>Overview</a:t>
             </a:r>
@@ -2633,7 +3124,7 @@
                   <a:srgbClr val="334154"/>
                 </a:solidFill>
                 <a:latin typeface="Raleway" pitchFamily="2" charset="77"/>
-                <a:cs typeface="Times New Roman"/>
+                <a:cs typeface="Times New Roman" panose="02020603050405020304"/>
               </a:rPr>
               <a:t>User</a:t>
             </a:r>
@@ -2643,7 +3134,7 @@
                   <a:srgbClr val="334154"/>
                 </a:solidFill>
                 <a:latin typeface="Raleway" pitchFamily="2" charset="77"/>
-                <a:cs typeface="Times New Roman"/>
+                <a:cs typeface="Times New Roman" panose="02020603050405020304"/>
               </a:rPr>
               <a:t> </a:t>
             </a:r>
@@ -2653,7 +3144,7 @@
                   <a:srgbClr val="334154"/>
                 </a:solidFill>
                 <a:latin typeface="Raleway" pitchFamily="2" charset="77"/>
-                <a:cs typeface="Times New Roman"/>
+                <a:cs typeface="Times New Roman" panose="02020603050405020304"/>
               </a:rPr>
               <a:t>Engagement</a:t>
             </a:r>
@@ -2663,7 +3154,7 @@
                   <a:srgbClr val="334154"/>
                 </a:solidFill>
                 <a:latin typeface="Raleway" pitchFamily="2" charset="77"/>
-                <a:cs typeface="Times New Roman"/>
+                <a:cs typeface="Times New Roman" panose="02020603050405020304"/>
               </a:rPr>
               <a:t> </a:t>
             </a:r>
@@ -2673,7 +3164,7 @@
                   <a:srgbClr val="334154"/>
                 </a:solidFill>
                 <a:latin typeface="Raleway" pitchFamily="2" charset="77"/>
-                <a:cs typeface="Times New Roman"/>
+                <a:cs typeface="Times New Roman" panose="02020603050405020304"/>
               </a:rPr>
               <a:t>Metrics:</a:t>
             </a:r>
@@ -2683,9 +3174,19 @@
                   <a:srgbClr val="334154"/>
                 </a:solidFill>
                 <a:latin typeface="Raleway" pitchFamily="2" charset="77"/>
-                <a:cs typeface="Times New Roman"/>
-              </a:rPr>
-              <a:t> 34</a:t>
+                <a:cs typeface="Times New Roman" panose="02020603050405020304"/>
+              </a:rPr>
+              <a:t> </a:t>
+            </a:r>
+            <a:r>
+              <a:rPr lang="en-US" altLang="en-GB" sz="1300" b="0" spc="15">
+                <a:solidFill>
+                  <a:srgbClr val="334154"/>
+                </a:solidFill>
+                <a:latin typeface="Raleway" pitchFamily="2" charset="77"/>
+                <a:cs typeface="Times New Roman" panose="02020603050405020304"/>
+              </a:rPr>
+              <a:t>27</a:t>
             </a:r>
             <a:r>
               <a:rPr lang="en-GB" sz="1300" b="0">
@@ -2693,7 +3194,7 @@
                   <a:srgbClr val="334154"/>
                 </a:solidFill>
                 <a:latin typeface="Raleway" pitchFamily="2" charset="77"/>
-                <a:cs typeface="Times New Roman"/>
+                <a:cs typeface="Times New Roman" panose="02020603050405020304"/>
               </a:rPr>
               <a:t>K</a:t>
             </a:r>
@@ -2703,7 +3204,7 @@
                   <a:srgbClr val="334154"/>
                 </a:solidFill>
                 <a:latin typeface="Raleway" pitchFamily="2" charset="77"/>
-                <a:cs typeface="Times New Roman"/>
+                <a:cs typeface="Times New Roman" panose="02020603050405020304"/>
               </a:rPr>
               <a:t> </a:t>
             </a:r>
@@ -2713,7 +3214,7 @@
                   <a:srgbClr val="334154"/>
                 </a:solidFill>
                 <a:latin typeface="Raleway" pitchFamily="2" charset="77"/>
-                <a:cs typeface="Times New Roman"/>
+                <a:cs typeface="Times New Roman" panose="02020603050405020304"/>
               </a:rPr>
               <a:t>Strong </a:t>
             </a:r>
@@ -2723,7 +3224,7 @@
                   <a:srgbClr val="334154"/>
                 </a:solidFill>
                 <a:latin typeface="Raleway" pitchFamily="2" charset="77"/>
-                <a:cs typeface="Times New Roman"/>
+                <a:cs typeface="Times New Roman" panose="02020603050405020304"/>
               </a:rPr>
               <a:t>Active User</a:t>
             </a:r>
@@ -2733,7 +3234,7 @@
                   <a:srgbClr val="334154"/>
                 </a:solidFill>
                 <a:latin typeface="Raleway" pitchFamily="2" charset="77"/>
-                <a:cs typeface="Times New Roman"/>
+                <a:cs typeface="Times New Roman" panose="02020603050405020304"/>
               </a:rPr>
               <a:t> </a:t>
             </a:r>
@@ -2743,13 +3244,13 @@
                   <a:srgbClr val="334154"/>
                 </a:solidFill>
                 <a:latin typeface="Raleway" pitchFamily="2" charset="77"/>
-                <a:cs typeface="Times New Roman"/>
+                <a:cs typeface="Times New Roman" panose="02020603050405020304"/>
               </a:rPr>
               <a:t>Baseline</a:t>
             </a:r>
             <a:endParaRPr sz="1300">
               <a:latin typeface="Raleway" pitchFamily="2" charset="77"/>
-              <a:cs typeface="Times New Roman"/>
+              <a:cs typeface="Times New Roman" panose="02020603050405020304"/>
             </a:endParaRPr>
           </a:p>
         </p:txBody>
@@ -2816,7 +3317,7 @@
             <a:p>
               <a:endParaRPr>
                 <a:latin typeface="Raleway" pitchFamily="2" charset="77"/>
-                <a:cs typeface="Times New Roman"/>
+                <a:cs typeface="Times New Roman" panose="02020603050405020304"/>
               </a:endParaRPr>
             </a:p>
           </p:txBody>
@@ -2869,7 +3370,7 @@
             <a:p>
               <a:endParaRPr>
                 <a:latin typeface="Raleway" pitchFamily="2" charset="77"/>
-                <a:cs typeface="Times New Roman"/>
+                <a:cs typeface="Times New Roman" panose="02020603050405020304"/>
               </a:endParaRPr>
             </a:p>
           </p:txBody>
@@ -2884,7 +3385,7 @@
         <p:spPr>
           <a:xfrm>
             <a:off x="429768" y="1170634"/>
-            <a:ext cx="2670175" cy="624205"/>
+            <a:ext cx="2670175" cy="616585"/>
           </a:xfrm>
           <a:prstGeom prst="rect">
             <a:avLst/>
@@ -2905,18 +3406,28 @@
               </a:spcBef>
             </a:pPr>
             <a:r>
+              <a:rPr lang="en-US" altLang="en-GB" sz="2450" b="1" spc="-10">
+                <a:solidFill>
+                  <a:srgbClr val="1E3989"/>
+                </a:solidFill>
+                <a:latin typeface="Raleway" pitchFamily="2" charset="77"/>
+                <a:cs typeface="Times New Roman" panose="02020603050405020304"/>
+              </a:rPr>
+              <a:t>27</a:t>
+            </a:r>
+            <a:r>
               <a:rPr lang="en-GB" sz="2450" b="1" spc="-10">
                 <a:solidFill>
                   <a:srgbClr val="1E3989"/>
                 </a:solidFill>
                 <a:latin typeface="Raleway" pitchFamily="2" charset="77"/>
-                <a:cs typeface="Times New Roman"/>
-              </a:rPr>
-              <a:t>34,000</a:t>
+                <a:cs typeface="Times New Roman" panose="02020603050405020304"/>
+              </a:rPr>
+              <a:t>,000</a:t>
             </a:r>
             <a:endParaRPr sz="2450">
               <a:latin typeface="Raleway" pitchFamily="2" charset="77"/>
-              <a:cs typeface="Times New Roman"/>
+              <a:cs typeface="Times New Roman" panose="02020603050405020304"/>
             </a:endParaRPr>
           </a:p>
           <a:p>
@@ -2934,7 +3445,7 @@
                   <a:srgbClr val="63748A"/>
                 </a:solidFill>
                 <a:latin typeface="Raleway" pitchFamily="2" charset="77"/>
-                <a:cs typeface="Times New Roman"/>
+                <a:cs typeface="Times New Roman" panose="02020603050405020304"/>
               </a:rPr>
               <a:t>Total</a:t>
             </a:r>
@@ -2944,7 +3455,7 @@
                   <a:srgbClr val="63748A"/>
                 </a:solidFill>
                 <a:latin typeface="Raleway" pitchFamily="2" charset="77"/>
-                <a:cs typeface="Times New Roman"/>
+                <a:cs typeface="Times New Roman" panose="02020603050405020304"/>
               </a:rPr>
               <a:t> </a:t>
             </a:r>
@@ -2954,7 +3465,7 @@
                   <a:srgbClr val="63748A"/>
                 </a:solidFill>
                 <a:latin typeface="Raleway" pitchFamily="2" charset="77"/>
-                <a:cs typeface="Times New Roman"/>
+                <a:cs typeface="Times New Roman" panose="02020603050405020304"/>
               </a:rPr>
               <a:t>Active</a:t>
             </a:r>
@@ -2964,7 +3475,7 @@
                   <a:srgbClr val="63748A"/>
                 </a:solidFill>
                 <a:latin typeface="Raleway" pitchFamily="2" charset="77"/>
-                <a:cs typeface="Times New Roman"/>
+                <a:cs typeface="Times New Roman" panose="02020603050405020304"/>
               </a:rPr>
               <a:t> </a:t>
             </a:r>
@@ -2974,13 +3485,13 @@
                   <a:srgbClr val="63748A"/>
                 </a:solidFill>
                 <a:latin typeface="Raleway" pitchFamily="2" charset="77"/>
-                <a:cs typeface="Times New Roman"/>
+                <a:cs typeface="Times New Roman" panose="02020603050405020304"/>
               </a:rPr>
               <a:t>Users</a:t>
             </a:r>
             <a:endParaRPr sz="800">
               <a:latin typeface="Raleway" pitchFamily="2" charset="77"/>
-              <a:cs typeface="Times New Roman"/>
+              <a:cs typeface="Times New Roman" panose="02020603050405020304"/>
             </a:endParaRPr>
           </a:p>
         </p:txBody>
@@ -3047,7 +3558,7 @@
             <a:p>
               <a:endParaRPr>
                 <a:latin typeface="Raleway" pitchFamily="2" charset="77"/>
-                <a:cs typeface="Times New Roman"/>
+                <a:cs typeface="Times New Roman" panose="02020603050405020304"/>
               </a:endParaRPr>
             </a:p>
           </p:txBody>
@@ -3100,7 +3611,7 @@
             <a:p>
               <a:endParaRPr>
                 <a:latin typeface="Raleway" pitchFamily="2" charset="77"/>
-                <a:cs typeface="Times New Roman"/>
+                <a:cs typeface="Times New Roman" panose="02020603050405020304"/>
               </a:endParaRPr>
             </a:p>
           </p:txBody>
@@ -3115,7 +3626,7 @@
         <p:spPr>
           <a:xfrm>
             <a:off x="3236976" y="1170634"/>
-            <a:ext cx="2670175" cy="624205"/>
+            <a:ext cx="2670175" cy="616585"/>
           </a:xfrm>
           <a:prstGeom prst="rect">
             <a:avLst/>
@@ -3141,13 +3652,33 @@
                   <a:srgbClr val="1E3989"/>
                 </a:solidFill>
                 <a:latin typeface="Raleway" pitchFamily="2" charset="77"/>
-                <a:cs typeface="Times New Roman"/>
-              </a:rPr>
-              <a:t>32,000</a:t>
+                <a:cs typeface="Times New Roman" panose="02020603050405020304"/>
+              </a:rPr>
+              <a:t>2</a:t>
+            </a:r>
+            <a:r>
+              <a:rPr lang="en-US" altLang="en-GB" sz="2450" b="1" spc="-10">
+                <a:solidFill>
+                  <a:srgbClr val="1E3989"/>
+                </a:solidFill>
+                <a:latin typeface="Raleway" pitchFamily="2" charset="77"/>
+                <a:cs typeface="Times New Roman" panose="02020603050405020304"/>
+              </a:rPr>
+              <a:t>5</a:t>
+            </a:r>
+            <a:r>
+              <a:rPr lang="en-GB" sz="2450" b="1" spc="-10">
+                <a:solidFill>
+                  <a:srgbClr val="1E3989"/>
+                </a:solidFill>
+                <a:latin typeface="Raleway" pitchFamily="2" charset="77"/>
+                <a:cs typeface="Times New Roman" panose="02020603050405020304"/>
+              </a:rPr>
+              <a:t>,000</a:t>
             </a:r>
             <a:endParaRPr sz="2450">
               <a:latin typeface="Raleway" pitchFamily="2" charset="77"/>
-              <a:cs typeface="Times New Roman"/>
+              <a:cs typeface="Times New Roman" panose="02020603050405020304"/>
             </a:endParaRPr>
           </a:p>
           <a:p>
@@ -3165,7 +3696,7 @@
                   <a:srgbClr val="63748A"/>
                 </a:solidFill>
                 <a:latin typeface="Raleway" pitchFamily="2" charset="77"/>
-                <a:cs typeface="Times New Roman"/>
+                <a:cs typeface="Times New Roman" panose="02020603050405020304"/>
               </a:rPr>
               <a:t>New</a:t>
             </a:r>
@@ -3175,7 +3706,7 @@
                   <a:srgbClr val="63748A"/>
                 </a:solidFill>
                 <a:latin typeface="Raleway" pitchFamily="2" charset="77"/>
-                <a:cs typeface="Times New Roman"/>
+                <a:cs typeface="Times New Roman" panose="02020603050405020304"/>
               </a:rPr>
               <a:t> </a:t>
             </a:r>
@@ -3185,7 +3716,7 @@
                   <a:srgbClr val="63748A"/>
                 </a:solidFill>
                 <a:latin typeface="Raleway" pitchFamily="2" charset="77"/>
-                <a:cs typeface="Times New Roman"/>
+                <a:cs typeface="Times New Roman" panose="02020603050405020304"/>
               </a:rPr>
               <a:t>Users</a:t>
             </a:r>
@@ -3195,7 +3726,7 @@
                   <a:srgbClr val="63748A"/>
                 </a:solidFill>
                 <a:latin typeface="Raleway" pitchFamily="2" charset="77"/>
-                <a:cs typeface="Times New Roman"/>
+                <a:cs typeface="Times New Roman" panose="02020603050405020304"/>
               </a:rPr>
               <a:t> </a:t>
             </a:r>
@@ -3205,13 +3736,13 @@
                   <a:srgbClr val="63748A"/>
                 </a:solidFill>
                 <a:latin typeface="Raleway" pitchFamily="2" charset="77"/>
-                <a:cs typeface="Times New Roman"/>
+                <a:cs typeface="Times New Roman" panose="02020603050405020304"/>
               </a:rPr>
               <a:t>(96.9%)</a:t>
             </a:r>
             <a:endParaRPr sz="800">
               <a:latin typeface="Raleway" pitchFamily="2" charset="77"/>
-              <a:cs typeface="Times New Roman"/>
+              <a:cs typeface="Times New Roman" panose="02020603050405020304"/>
             </a:endParaRPr>
           </a:p>
         </p:txBody>
@@ -3278,7 +3809,7 @@
             <a:p>
               <a:endParaRPr>
                 <a:latin typeface="Raleway" pitchFamily="2" charset="77"/>
-                <a:cs typeface="Times New Roman"/>
+                <a:cs typeface="Times New Roman" panose="02020603050405020304"/>
               </a:endParaRPr>
             </a:p>
           </p:txBody>
@@ -3331,7 +3862,7 @@
             <a:p>
               <a:endParaRPr>
                 <a:latin typeface="Raleway" pitchFamily="2" charset="77"/>
-                <a:cs typeface="Times New Roman"/>
+                <a:cs typeface="Times New Roman" panose="02020603050405020304"/>
               </a:endParaRPr>
             </a:p>
           </p:txBody>
@@ -3346,7 +3877,7 @@
         <p:spPr>
           <a:xfrm>
             <a:off x="6044184" y="1170634"/>
-            <a:ext cx="2670175" cy="624205"/>
+            <a:ext cx="2670175" cy="616585"/>
           </a:xfrm>
           <a:prstGeom prst="rect">
             <a:avLst/>
@@ -3364,18 +3895,28 @@
               </a:spcBef>
             </a:pPr>
             <a:r>
+              <a:rPr lang="en-US" altLang="en-GB" sz="2450" b="1" spc="-25">
+                <a:solidFill>
+                  <a:srgbClr val="1E3989"/>
+                </a:solidFill>
+                <a:latin typeface="Raleway" pitchFamily="2" charset="77"/>
+                <a:cs typeface="Times New Roman" panose="02020603050405020304"/>
+              </a:rPr>
+              <a:t>58 </a:t>
+            </a:r>
+            <a:r>
               <a:rPr lang="en-GB" sz="2450" b="1" spc="-25">
                 <a:solidFill>
                   <a:srgbClr val="1E3989"/>
                 </a:solidFill>
                 <a:latin typeface="Raleway" pitchFamily="2" charset="77"/>
-                <a:cs typeface="Times New Roman"/>
-              </a:rPr>
-              <a:t>47seconds</a:t>
+                <a:cs typeface="Times New Roman" panose="02020603050405020304"/>
+              </a:rPr>
+              <a:t>seconds</a:t>
             </a:r>
             <a:endParaRPr sz="2450">
               <a:latin typeface="Raleway" pitchFamily="2" charset="77"/>
-              <a:cs typeface="Times New Roman"/>
+              <a:cs typeface="Times New Roman" panose="02020603050405020304"/>
             </a:endParaRPr>
           </a:p>
           <a:p>
@@ -3393,7 +3934,7 @@
                   <a:srgbClr val="63748A"/>
                 </a:solidFill>
                 <a:latin typeface="Raleway" pitchFamily="2" charset="77"/>
-                <a:cs typeface="Times New Roman"/>
+                <a:cs typeface="Times New Roman" panose="02020603050405020304"/>
               </a:rPr>
               <a:t>Avg</a:t>
             </a:r>
@@ -3403,7 +3944,7 @@
                   <a:srgbClr val="63748A"/>
                 </a:solidFill>
                 <a:latin typeface="Raleway" pitchFamily="2" charset="77"/>
-                <a:cs typeface="Times New Roman"/>
+                <a:cs typeface="Times New Roman" panose="02020603050405020304"/>
               </a:rPr>
               <a:t> </a:t>
             </a:r>
@@ -3413,7 +3954,7 @@
                   <a:srgbClr val="63748A"/>
                 </a:solidFill>
                 <a:latin typeface="Raleway" pitchFamily="2" charset="77"/>
-                <a:cs typeface="Times New Roman"/>
+                <a:cs typeface="Times New Roman" panose="02020603050405020304"/>
               </a:rPr>
               <a:t>Engagement</a:t>
             </a:r>
@@ -3423,7 +3964,7 @@
                   <a:srgbClr val="63748A"/>
                 </a:solidFill>
                 <a:latin typeface="Raleway" pitchFamily="2" charset="77"/>
-                <a:cs typeface="Times New Roman"/>
+                <a:cs typeface="Times New Roman" panose="02020603050405020304"/>
               </a:rPr>
               <a:t> </a:t>
             </a:r>
@@ -3433,13 +3974,13 @@
                   <a:srgbClr val="63748A"/>
                 </a:solidFill>
                 <a:latin typeface="Raleway" pitchFamily="2" charset="77"/>
-                <a:cs typeface="Times New Roman"/>
+                <a:cs typeface="Times New Roman" panose="02020603050405020304"/>
               </a:rPr>
               <a:t>Time</a:t>
             </a:r>
             <a:endParaRPr sz="800">
               <a:latin typeface="Raleway" pitchFamily="2" charset="77"/>
-              <a:cs typeface="Times New Roman"/>
+              <a:cs typeface="Times New Roman" panose="02020603050405020304"/>
             </a:endParaRPr>
           </a:p>
         </p:txBody>
@@ -3453,7 +3994,7 @@
         <p:spPr>
           <a:xfrm>
             <a:off x="434340" y="2127897"/>
-            <a:ext cx="3816733" cy="2677015"/>
+            <a:ext cx="3816733" cy="2983865"/>
           </a:xfrm>
           <a:prstGeom prst="rect">
             <a:avLst/>
@@ -3471,43 +4012,49 @@
           <a:lstStyle/>
           <a:p>
             <a:r>
-              <a:rPr lang="en-ZW" sz="1000">
-                <a:latin typeface="Raleway" pitchFamily="2" charset="77"/>
-              </a:rPr>
-              <a:t>February 2026 reflects solid and encouraging performance for the  Econet website, with a total of 34,000 active users recorded during the period. Of these, 32,000 users (96.9%) were new visitors, highlighting continued strong brand discovery and the effectiveness of current reach and awareness initiatives.</a:t>
-            </a:r>
-          </a:p>
-          <a:p>
-            <a:endParaRPr lang="en-ZW" sz="1000">
+              <a:rPr lang="en-US" sz="1000">
+                <a:latin typeface="Raleway" pitchFamily="2" charset="77"/>
+              </a:rPr>
+              <a:t>March 2026 reflects solid and encouraging performance for the  Econet website, with a total of 27,000 active users recorded during the period. Of these, 25,000 users (92.5%) were new visitors, highlighting continued strong brand discovery and the effectiveness of current reach and awareness initiatives.</a:t>
+            </a:r>
+            <a:endParaRPr lang="en-US" sz="1000">
               <a:latin typeface="Raleway" pitchFamily="2" charset="77"/>
             </a:endParaRPr>
           </a:p>
           <a:p>
-            <a:r>
-              <a:rPr lang="en-ZW" sz="1000">
-                <a:latin typeface="Raleway" pitchFamily="2" charset="77"/>
-              </a:rPr>
-              <a:t>The consistently high proportion of new users suggests that marketing efforts, search visibility, and broader brand exposure are successfully attracting first-time audiences to the platform. This level of new user acquisition indicates that the website remains highly discoverable and competitive within its category.</a:t>
-            </a:r>
-          </a:p>
-          <a:p>
-            <a:endParaRPr lang="en-ZW" sz="1000">
+            <a:endParaRPr lang="en-US" sz="1000">
               <a:latin typeface="Raleway" pitchFamily="2" charset="77"/>
             </a:endParaRPr>
           </a:p>
           <a:p>
             <a:r>
-              <a:rPr lang="en-ZW" sz="1000">
-                <a:latin typeface="Raleway" pitchFamily="2" charset="77"/>
-              </a:rPr>
-              <a:t>The average engagement time of 47 seconds demonstrates moderate but meaningful interaction. While slightly below longer-form corporate engagement benchmarks, this duration suggests that users are spending enough time to review key information rather than exiting immediately. </a:t>
+              <a:rPr lang="en-US" sz="1000">
+                <a:latin typeface="Raleway" pitchFamily="2" charset="77"/>
+              </a:rPr>
+              <a:t>The consistently high proportion of new users suggests that marketing efforts, search visibility, and broader brand exposure are successfully attracting first-time audiences to the platform. This level of new user acquisition indicates that the website remains highly discoverable and competitive within its category.</a:t>
+            </a:r>
+            <a:endParaRPr lang="en-US" sz="1000">
+              <a:latin typeface="Raleway" pitchFamily="2" charset="77"/>
+            </a:endParaRPr>
+          </a:p>
+          <a:p>
+            <a:endParaRPr lang="en-US" sz="1000">
+              <a:latin typeface="Raleway" pitchFamily="2" charset="77"/>
+            </a:endParaRPr>
+          </a:p>
+          <a:p>
+            <a:r>
+              <a:rPr lang="en-US" sz="1000">
+                <a:latin typeface="Raleway" pitchFamily="2" charset="77"/>
+              </a:rPr>
+              <a:t>The average engagement time of 58 seconds demonstrates moderate but meaningful interaction. While slightly below longer-form corporate engagement benchmarks, this duration suggests that users are spending enough time to review key information rather than exiting immediately. </a:t>
             </a:r>
             <a:endParaRPr lang="en-US" sz="1000" spc="-10">
               <a:solidFill>
                 <a:srgbClr val="334154"/>
               </a:solidFill>
               <a:latin typeface="Raleway" pitchFamily="2" charset="77"/>
-              <a:cs typeface="Times New Roman"/>
+              <a:cs typeface="Times New Roman" panose="02020603050405020304"/>
             </a:endParaRPr>
           </a:p>
         </p:txBody>
@@ -3574,7 +4121,7 @@
             <a:p>
               <a:endParaRPr>
                 <a:latin typeface="Raleway" pitchFamily="2" charset="77"/>
-                <a:cs typeface="Times New Roman"/>
+                <a:cs typeface="Times New Roman" panose="02020603050405020304"/>
               </a:endParaRPr>
             </a:p>
           </p:txBody>
@@ -3629,7 +4176,7 @@
             <a:p>
               <a:endParaRPr>
                 <a:latin typeface="Raleway" pitchFamily="2" charset="77"/>
-                <a:cs typeface="Times New Roman"/>
+                <a:cs typeface="Times New Roman" panose="02020603050405020304"/>
               </a:endParaRPr>
             </a:p>
           </p:txBody>
@@ -3637,28 +4184,22 @@
       </p:grpSp>
       <p:pic>
         <p:nvPicPr>
-          <p:cNvPr id="19" name="Picture 18" descr="A graph showing the number of users&#10;&#10;AI-generated content may be incorrect.">
-            <a:extLst>
-              <a:ext uri="{FF2B5EF4-FFF2-40B4-BE49-F238E27FC236}">
-                <a16:creationId xmlns:a16="http://schemas.microsoft.com/office/drawing/2014/main" id="{BE73442A-2926-CACA-EFC0-E0BECBD3113D}"/>
-              </a:ext>
-            </a:extLst>
-          </p:cNvPr>
+          <p:cNvPr id="20" name="Picture 19" descr="Screenshot 2026-03-30 at 09.36.55"/>
           <p:cNvPicPr>
             <a:picLocks noChangeAspect="1"/>
           </p:cNvPicPr>
           <p:nvPr/>
         </p:nvPicPr>
         <p:blipFill>
-          <a:blip r:embed="rId2"/>
+          <a:blip r:embed="rId1"/>
           <a:stretch>
             <a:fillRect/>
           </a:stretch>
         </p:blipFill>
         <p:spPr>
           <a:xfrm>
-            <a:off x="4569722" y="2319388"/>
-            <a:ext cx="4139938" cy="2454571"/>
+            <a:off x="4648200" y="2498725"/>
+            <a:ext cx="4048125" cy="2289810"/>
           </a:xfrm>
           <a:prstGeom prst="rect">
             <a:avLst/>
@@ -3722,27 +4263,27 @@
             <a:r>
               <a:rPr spc="65">
                 <a:latin typeface="Raleway" pitchFamily="2" charset="77"/>
-                <a:cs typeface="Times New Roman"/>
+                <a:cs typeface="Times New Roman" panose="02020603050405020304"/>
               </a:rPr>
               <a:t>Geographic</a:t>
             </a:r>
             <a:r>
               <a:rPr spc="-50">
                 <a:latin typeface="Raleway" pitchFamily="2" charset="77"/>
-                <a:cs typeface="Times New Roman"/>
+                <a:cs typeface="Times New Roman" panose="02020603050405020304"/>
               </a:rPr>
               <a:t> </a:t>
             </a:r>
             <a:r>
               <a:rPr spc="-10">
                 <a:latin typeface="Raleway" pitchFamily="2" charset="77"/>
-                <a:cs typeface="Times New Roman"/>
+                <a:cs typeface="Times New Roman" panose="02020603050405020304"/>
               </a:rPr>
               <a:t>Performance</a:t>
             </a:r>
             <a:endParaRPr lang="en-US" spc="-10">
               <a:latin typeface="Raleway" pitchFamily="2" charset="77"/>
-              <a:cs typeface="Times New Roman"/>
+              <a:cs typeface="Times New Roman" panose="02020603050405020304"/>
             </a:endParaRPr>
           </a:p>
           <a:p>
@@ -3751,7 +4292,7 @@
                 <a:spcPct val="100000"/>
               </a:lnSpc>
               <a:spcBef>
-                <a:spcPts val="284"/>
+                <a:spcPts val="285"/>
               </a:spcBef>
             </a:pPr>
             <a:r>
@@ -3760,7 +4301,7 @@
                   <a:srgbClr val="334154"/>
                 </a:solidFill>
                 <a:latin typeface="Raleway" pitchFamily="2" charset="77"/>
-                <a:cs typeface="Times New Roman"/>
+                <a:cs typeface="Times New Roman" panose="02020603050405020304"/>
               </a:rPr>
               <a:t>Zimbabwe</a:t>
             </a:r>
@@ -3770,7 +4311,7 @@
                   <a:srgbClr val="334154"/>
                 </a:solidFill>
                 <a:latin typeface="Raleway" pitchFamily="2" charset="77"/>
-                <a:cs typeface="Times New Roman"/>
+                <a:cs typeface="Times New Roman" panose="02020603050405020304"/>
               </a:rPr>
               <a:t> </a:t>
             </a:r>
@@ -3780,7 +4321,7 @@
                   <a:srgbClr val="334154"/>
                 </a:solidFill>
                 <a:latin typeface="Raleway" pitchFamily="2" charset="77"/>
-                <a:cs typeface="Times New Roman"/>
+                <a:cs typeface="Times New Roman" panose="02020603050405020304"/>
               </a:rPr>
               <a:t>Dominance</a:t>
             </a:r>
@@ -3790,7 +4331,7 @@
                   <a:srgbClr val="334154"/>
                 </a:solidFill>
                 <a:latin typeface="Raleway" pitchFamily="2" charset="77"/>
-                <a:cs typeface="Times New Roman"/>
+                <a:cs typeface="Times New Roman" panose="02020603050405020304"/>
               </a:rPr>
               <a:t> </a:t>
             </a:r>
@@ -3800,7 +4341,7 @@
                   <a:srgbClr val="334154"/>
                 </a:solidFill>
                 <a:latin typeface="Raleway" pitchFamily="2" charset="77"/>
-                <a:cs typeface="Times New Roman"/>
+                <a:cs typeface="Times New Roman" panose="02020603050405020304"/>
               </a:rPr>
               <a:t>with</a:t>
             </a:r>
@@ -3810,7 +4351,7 @@
                   <a:srgbClr val="334154"/>
                 </a:solidFill>
                 <a:latin typeface="Raleway" pitchFamily="2" charset="77"/>
-                <a:cs typeface="Times New Roman"/>
+                <a:cs typeface="Times New Roman" panose="02020603050405020304"/>
               </a:rPr>
               <a:t> International</a:t>
             </a:r>
@@ -3820,7 +4361,7 @@
                   <a:srgbClr val="334154"/>
                 </a:solidFill>
                 <a:latin typeface="Raleway" pitchFamily="2" charset="77"/>
-                <a:cs typeface="Times New Roman"/>
+                <a:cs typeface="Times New Roman" panose="02020603050405020304"/>
               </a:rPr>
               <a:t> </a:t>
             </a:r>
@@ -3830,13 +4371,13 @@
                   <a:srgbClr val="334154"/>
                 </a:solidFill>
                 <a:latin typeface="Raleway" pitchFamily="2" charset="77"/>
-                <a:cs typeface="Times New Roman"/>
+                <a:cs typeface="Times New Roman" panose="02020603050405020304"/>
               </a:rPr>
               <a:t>Opportunity</a:t>
             </a:r>
             <a:endParaRPr sz="1300">
               <a:latin typeface="Raleway" pitchFamily="2" charset="77"/>
-              <a:cs typeface="Times New Roman"/>
+              <a:cs typeface="Times New Roman" panose="02020603050405020304"/>
             </a:endParaRPr>
           </a:p>
         </p:txBody>
@@ -3969,7 +4510,7 @@
         <p:spPr>
           <a:xfrm>
             <a:off x="401612" y="1347233"/>
-            <a:ext cx="3797087" cy="2840778"/>
+            <a:ext cx="3797087" cy="3018155"/>
           </a:xfrm>
           <a:prstGeom prst="rect">
             <a:avLst/>
@@ -3982,72 +4523,84 @@
           <a:lstStyle/>
           <a:p>
             <a:r>
-              <a:rPr lang="en-ZW" sz="1000">
+              <a:rPr lang="en-US" sz="1000">
                 <a:latin typeface="Raleway" pitchFamily="2" charset="77"/>
               </a:rPr>
               <a:t>Geographic performance shows </a:t>
             </a:r>
             <a:r>
-              <a:rPr lang="en-ZW" sz="1000" b="1">
+              <a:rPr lang="en-US" sz="1000" b="1">
                 <a:latin typeface="Raleway" pitchFamily="2" charset="77"/>
               </a:rPr>
               <a:t>Zimbabwe</a:t>
             </a:r>
             <a:r>
-              <a:rPr lang="en-ZW" sz="1000">
-                <a:latin typeface="Raleway" pitchFamily="2" charset="77"/>
-              </a:rPr>
-              <a:t> as the dominant market, contributing 28,815 users (83.88% of total traffic) with a 36.73% engagement rate and 0.52 engaged sessions per user delivering strong volume with steady interaction.</a:t>
-            </a:r>
-          </a:p>
-          <a:p>
-            <a:endParaRPr lang="en-ZW" sz="1000">
+              <a:rPr lang="en-US" sz="1000">
+                <a:latin typeface="Raleway" pitchFamily="2" charset="77"/>
+              </a:rPr>
+              <a:t> as the dominant market, contributing 21,735 users (80.66% of total traffic) with a 47.98% engagement rate and 0.70 engaged sessions per user delivering strong volume with steady interaction.</a:t>
+            </a:r>
+            <a:endParaRPr lang="en-US" sz="1000">
               <a:latin typeface="Raleway" pitchFamily="2" charset="77"/>
             </a:endParaRPr>
           </a:p>
           <a:p>
-            <a:r>
-              <a:rPr lang="en-ZW" sz="1000">
-                <a:latin typeface="Raleway" pitchFamily="2" charset="77"/>
-              </a:rPr>
-              <a:t>South Africa (1,212 users) records a higher 50.96% engagement rate, indicating stronger visit quality despite lower traffic. </a:t>
-            </a:r>
-          </a:p>
-          <a:p>
-            <a:endParaRPr lang="en-ZW" sz="1000">
+            <a:endParaRPr lang="en-US" sz="1000">
               <a:latin typeface="Raleway" pitchFamily="2" charset="77"/>
             </a:endParaRPr>
           </a:p>
           <a:p>
             <a:r>
-              <a:rPr lang="en-ZW" sz="1000">
-                <a:latin typeface="Raleway" pitchFamily="2" charset="77"/>
-              </a:rPr>
-              <a:t>The United States shows moderate but stable engagement at 39.55%.Notably, smaller markets such as the UK (56.1%), Netherlands (56.09%), India (57.38%), and Australia (65.73%) demonstrate the strongest engagement efficiency, suggesting high-intent audiences. </a:t>
-            </a:r>
-          </a:p>
-          <a:p>
-            <a:endParaRPr lang="en-ZW" sz="1000">
+              <a:rPr lang="en-US" sz="1000">
+                <a:latin typeface="Raleway" pitchFamily="2" charset="77"/>
+              </a:rPr>
+              <a:t>South Africa (1,045 users) records a higher 57.81% engagement rate, indicating stronger visit quality despite lower traffic. </a:t>
+            </a:r>
+            <a:endParaRPr lang="en-US" sz="1000">
               <a:latin typeface="Raleway" pitchFamily="2" charset="77"/>
             </a:endParaRPr>
           </a:p>
           <a:p>
-            <a:r>
-              <a:rPr lang="en-ZW" sz="1000">
+            <a:endParaRPr lang="en-US" sz="1000">
+              <a:latin typeface="Raleway" pitchFamily="2" charset="77"/>
+            </a:endParaRPr>
+          </a:p>
+          <a:p>
+            <a:r>
+              <a:rPr lang="en-US" sz="1000">
+                <a:latin typeface="Raleway" pitchFamily="2" charset="77"/>
+              </a:rPr>
+              <a:t>The United Kingdom shows moderate but stable engagement at 60.21%.Notably, smaller markets such as the USA (52.95%), Netherlands (74.72%), India (68.53%), and Australia (63.41%) demonstrate the strongest engagement efficiency, suggesting high-intent audiences. </a:t>
+            </a:r>
+            <a:endParaRPr lang="en-US" sz="1000">
+              <a:latin typeface="Raleway" pitchFamily="2" charset="77"/>
+            </a:endParaRPr>
+          </a:p>
+          <a:p>
+            <a:endParaRPr lang="en-US" sz="1000">
+              <a:latin typeface="Raleway" pitchFamily="2" charset="77"/>
+            </a:endParaRPr>
+          </a:p>
+          <a:p>
+            <a:r>
+              <a:rPr lang="en-US" sz="1000">
                 <a:latin typeface="Raleway" pitchFamily="2" charset="77"/>
               </a:rPr>
               <a:t>Overall, Zimbabwe drives scale, while select international markets show strong engagement depth and potential conversion value.</a:t>
             </a:r>
+            <a:endParaRPr lang="en-US" sz="1000">
+              <a:latin typeface="Raleway" pitchFamily="2" charset="77"/>
+            </a:endParaRPr>
           </a:p>
           <a:p>
             <a:pPr marL="183515" marR="99060" indent="-171450">
               <a:lnSpc>
-                <a:spcPct val="147100"/>
+                <a:spcPct val="147000"/>
               </a:lnSpc>
               <a:spcBef>
                 <a:spcPts val="90"/>
               </a:spcBef>
-              <a:buFont typeface="Arial"/>
+              <a:buFont typeface="Arial" panose="020B0704020202020204"/>
               <a:buChar char="•"/>
               <a:tabLst>
                 <a:tab pos="184150" algn="l"/>
@@ -4058,7 +4611,7 @@
                 <a:srgbClr val="334154"/>
               </a:solidFill>
               <a:latin typeface="Raleway" pitchFamily="2" charset="77"/>
-              <a:cs typeface="Times New Roman"/>
+              <a:cs typeface="Times New Roman" panose="02020603050405020304"/>
             </a:endParaRPr>
           </a:p>
         </p:txBody>
@@ -4186,28 +4739,22 @@
       </p:grpSp>
       <p:pic>
         <p:nvPicPr>
-          <p:cNvPr id="11" name="Picture 10" descr="A screenshot of a data&#10;&#10;AI-generated content may be incorrect.">
-            <a:extLst>
-              <a:ext uri="{FF2B5EF4-FFF2-40B4-BE49-F238E27FC236}">
-                <a16:creationId xmlns:a16="http://schemas.microsoft.com/office/drawing/2014/main" id="{A65D2908-DB87-B2B3-1BA3-5C04BB580E91}"/>
-              </a:ext>
-            </a:extLst>
-          </p:cNvPr>
+          <p:cNvPr id="10" name="Picture 9" descr="Screenshot 2026-03-30 at 09.40.21"/>
           <p:cNvPicPr>
             <a:picLocks noChangeAspect="1"/>
           </p:cNvPicPr>
           <p:nvPr/>
         </p:nvPicPr>
         <p:blipFill>
-          <a:blip r:embed="rId2"/>
+          <a:blip r:embed="rId1"/>
           <a:stretch>
             <a:fillRect/>
           </a:stretch>
         </p:blipFill>
         <p:spPr>
           <a:xfrm>
-            <a:off x="4301498" y="1347233"/>
-            <a:ext cx="4354797" cy="3044459"/>
+            <a:off x="4314190" y="1431925"/>
+            <a:ext cx="4328795" cy="2662555"/>
           </a:xfrm>
           <a:prstGeom prst="rect">
             <a:avLst/>
@@ -4275,27 +4822,27 @@
             <a:r>
               <a:rPr spc="120">
                 <a:latin typeface="Raleway" pitchFamily="2" charset="77"/>
-                <a:cs typeface="Times New Roman"/>
+                <a:cs typeface="Times New Roman" panose="02020603050405020304"/>
               </a:rPr>
               <a:t>Page</a:t>
             </a:r>
             <a:r>
               <a:rPr spc="-85">
                 <a:latin typeface="Raleway" pitchFamily="2" charset="77"/>
-                <a:cs typeface="Times New Roman"/>
+                <a:cs typeface="Times New Roman" panose="02020603050405020304"/>
               </a:rPr>
               <a:t> </a:t>
             </a:r>
             <a:r>
               <a:rPr spc="35">
                 <a:latin typeface="Raleway" pitchFamily="2" charset="77"/>
-                <a:cs typeface="Times New Roman"/>
+                <a:cs typeface="Times New Roman" panose="02020603050405020304"/>
               </a:rPr>
               <a:t>Performance</a:t>
             </a:r>
             <a:endParaRPr lang="en-US" spc="35">
               <a:latin typeface="Raleway" pitchFamily="2" charset="77"/>
-              <a:cs typeface="Times New Roman"/>
+              <a:cs typeface="Times New Roman" panose="02020603050405020304"/>
             </a:endParaRPr>
           </a:p>
         </p:txBody>
@@ -4309,7 +4856,7 @@
         <p:spPr>
           <a:xfrm>
             <a:off x="428381" y="900929"/>
-            <a:ext cx="4219641" cy="378950"/>
+            <a:ext cx="4219641" cy="531495"/>
           </a:xfrm>
           <a:prstGeom prst="rect">
             <a:avLst/>
@@ -4328,7 +4875,7 @@
                   <a:srgbClr val="334154"/>
                 </a:solidFill>
                 <a:latin typeface="Raleway" pitchFamily="2" charset="77"/>
-                <a:cs typeface="Times New Roman"/>
+                <a:cs typeface="Times New Roman" panose="02020603050405020304"/>
               </a:rPr>
               <a:t>The </a:t>
             </a:r>
@@ -4338,9 +4885,29 @@
                   <a:srgbClr val="334154"/>
                 </a:solidFill>
                 <a:latin typeface="Raleway" pitchFamily="2" charset="77"/>
-                <a:cs typeface="Times New Roman"/>
-              </a:rPr>
-              <a:t>Homepage and Vacancies pages drive meaningful engagement</a:t>
+                <a:cs typeface="Times New Roman" panose="02020603050405020304"/>
+              </a:rPr>
+              <a:t>Homepage and </a:t>
+            </a:r>
+            <a:r>
+              <a:rPr lang="en-US" altLang="en-GB" sz="1000" b="1" spc="-10">
+                <a:solidFill>
+                  <a:srgbClr val="334154"/>
+                </a:solidFill>
+                <a:latin typeface="Raleway" pitchFamily="2" charset="77"/>
+                <a:cs typeface="Times New Roman" panose="02020603050405020304"/>
+              </a:rPr>
+              <a:t>iJoy after Joy </a:t>
+            </a:r>
+            <a:r>
+              <a:rPr lang="en-GB" sz="1000" b="1" spc="-10">
+                <a:solidFill>
+                  <a:srgbClr val="334154"/>
+                </a:solidFill>
+                <a:latin typeface="Raleway" pitchFamily="2" charset="77"/>
+                <a:cs typeface="Times New Roman" panose="02020603050405020304"/>
+              </a:rPr>
+              <a:t>pages drive meaningful engagement</a:t>
             </a:r>
             <a:r>
               <a:rPr lang="en-GB" sz="1000" spc="-10">
@@ -4348,7 +4915,7 @@
                   <a:srgbClr val="334154"/>
                 </a:solidFill>
                 <a:latin typeface="Raleway" pitchFamily="2" charset="77"/>
-                <a:cs typeface="Times New Roman"/>
+                <a:cs typeface="Times New Roman" panose="02020603050405020304"/>
               </a:rPr>
               <a:t>.</a:t>
             </a:r>
@@ -4357,7 +4924,7 @@
                 <a:srgbClr val="000000"/>
               </a:solidFill>
               <a:latin typeface="Raleway" pitchFamily="2" charset="77"/>
-              <a:cs typeface="Times New Roman"/>
+              <a:cs typeface="Times New Roman" panose="02020603050405020304"/>
             </a:endParaRPr>
           </a:p>
           <a:p>
@@ -4374,7 +4941,7 @@
                 <a:srgbClr val="334154"/>
               </a:solidFill>
               <a:latin typeface="Raleway" pitchFamily="2" charset="77"/>
-              <a:cs typeface="Times New Roman"/>
+              <a:cs typeface="Times New Roman" panose="02020603050405020304"/>
             </a:endParaRPr>
           </a:p>
         </p:txBody>
@@ -4506,8 +5073,8 @@
         </p:nvSpPr>
         <p:spPr>
           <a:xfrm>
-            <a:off x="429768" y="1500986"/>
-            <a:ext cx="3438525" cy="3115595"/>
+            <a:off x="429895" y="1501140"/>
+            <a:ext cx="3610610" cy="3260090"/>
           </a:xfrm>
           <a:prstGeom prst="rect">
             <a:avLst/>
@@ -4520,118 +5087,212 @@
           <a:lstStyle/>
           <a:p>
             <a:r>
-              <a:rPr lang="en-ZW" sz="1000" b="1">
+              <a:rPr lang="en-US" sz="1000" b="1">
+                <a:solidFill>
+                  <a:schemeClr val="tx1"/>
+                </a:solidFill>
                 <a:latin typeface="Raleway" pitchFamily="2" charset="77"/>
               </a:rPr>
               <a:t>Overall Insight:</a:t>
             </a:r>
-          </a:p>
-          <a:p>
-            <a:br>
-              <a:rPr lang="en-ZW" sz="1000">
-                <a:latin typeface="Raleway"/>
-              </a:rPr>
-            </a:br>
-            <a:r>
-              <a:rPr lang="en-ZW" sz="1000">
-                <a:latin typeface="Raleway"/>
-              </a:rPr>
-              <a:t>The </a:t>
-            </a:r>
-            <a:r>
-              <a:rPr lang="en-ZW" sz="1000" i="1" err="1">
-                <a:latin typeface="Raleway"/>
-              </a:rPr>
-              <a:t>iJoy</a:t>
-            </a:r>
-            <a:r>
-              <a:rPr lang="en-ZW" sz="1000" i="1">
-                <a:latin typeface="Raleway"/>
-              </a:rPr>
-              <a:t> </a:t>
-            </a:r>
-            <a:r>
-              <a:rPr lang="en-ZW" sz="1000" i="1" err="1">
-                <a:latin typeface="Raleway"/>
-              </a:rPr>
-              <a:t>Afta</a:t>
-            </a:r>
-            <a:r>
-              <a:rPr lang="en-ZW" sz="1000" i="1">
-                <a:latin typeface="Raleway"/>
-              </a:rPr>
-              <a:t> Joy Terms &amp; Conditions</a:t>
-            </a:r>
-            <a:r>
-              <a:rPr lang="en-ZW" sz="1000">
-                <a:latin typeface="Raleway"/>
-              </a:rPr>
-              <a:t> page drives the highest traffic (31.7% of total views), as a result of strong paid media efforts; however, its lower views per user (1.57) suggests it functions primarily as an informational or compliance gateway rather than a deep engagement page.</a:t>
-            </a:r>
-          </a:p>
-          <a:p>
-            <a:endParaRPr lang="en-ZW" sz="1000">
+            <a:endParaRPr lang="en-US" sz="1000" b="1">
+              <a:solidFill>
+                <a:schemeClr val="tx1"/>
+              </a:solidFill>
               <a:latin typeface="Raleway" pitchFamily="2" charset="77"/>
             </a:endParaRPr>
           </a:p>
           <a:p>
-            <a:r>
-              <a:rPr lang="en-ZW" sz="1000">
+            <a:br>
+              <a:rPr lang="en-US" sz="1000">
+                <a:solidFill>
+                  <a:schemeClr val="tx1"/>
+                </a:solidFill>
                 <a:latin typeface="Raleway"/>
               </a:rPr>
-              <a:t>The Homepage remains a key entry point with strong user volume, reinforcing its role as a central navigation hub.</a:t>
-            </a:r>
-          </a:p>
-          <a:p>
-            <a:r>
-              <a:rPr lang="en-ZW" sz="1000">
-                <a:latin typeface="Raleway"/>
-              </a:rPr>
-              <a:t>Product-driven pages such as Devices (2.19 views per user – highest depth), </a:t>
-            </a:r>
-            <a:r>
-              <a:rPr lang="en-ZW" sz="1000" err="1">
-                <a:latin typeface="Raleway"/>
-              </a:rPr>
-              <a:t>eSim</a:t>
-            </a:r>
-            <a:r>
-              <a:rPr lang="en-ZW" sz="1000">
-                <a:latin typeface="Raleway"/>
-              </a:rPr>
-              <a:t> (1.90), and USSD Data Bundles demonstrate stronger browsing intent, indicating commercial interest and higher engagement quality.</a:t>
-            </a:r>
-          </a:p>
-          <a:p>
-            <a:endParaRPr lang="en-ZW" sz="1000">
-              <a:latin typeface="Raleway" pitchFamily="2" charset="77"/>
-            </a:endParaRPr>
-          </a:p>
-          <a:p>
-            <a:r>
-              <a:rPr lang="en-ZW" sz="1000">
-                <a:latin typeface="Raleway" pitchFamily="2" charset="77"/>
-              </a:rPr>
-              <a:t>Support-oriented pages like Contact Us and Customer Experience contribute steady traffic but are not primary drivers of repeat interaction.</a:t>
-            </a:r>
-          </a:p>
-          <a:p>
-            <a:pPr marL="348615" marR="204470" indent="-171450">
-              <a:lnSpc>
-                <a:spcPct val="114300"/>
-              </a:lnSpc>
-              <a:buFont typeface="Arial"/>
-              <a:buChar char="•"/>
-              <a:tabLst>
-                <a:tab pos="349250" algn="l"/>
-              </a:tabLst>
-            </a:pPr>
-            <a:endParaRPr sz="1000" spc="-10">
+            </a:br>
+            <a:r>
+              <a:rPr lang="en-US" altLang="en-US" sz="1000" spc="-10">
+                <a:solidFill>
+                  <a:schemeClr val="tx1"/>
+                </a:solidFill>
+                <a:latin typeface="Raleway" pitchFamily="2" charset="77"/>
+                <a:cs typeface="Times New Roman" panose="02020603050405020304"/>
+              </a:rPr>
+              <a:t>The </a:t>
+            </a:r>
+            <a:r>
+              <a:rPr lang="en-US" altLang="en-US" sz="1000" i="1" spc="-10">
+                <a:solidFill>
+                  <a:schemeClr val="tx1"/>
+                </a:solidFill>
+                <a:latin typeface="Raleway" pitchFamily="2" charset="77"/>
+                <a:cs typeface="Times New Roman" panose="02020603050405020304"/>
+              </a:rPr>
+              <a:t>iJoy Afta Joy – Terms and Conditions</a:t>
+            </a:r>
+            <a:r>
+              <a:rPr lang="en-US" altLang="en-US" sz="1000" spc="-10">
+                <a:solidFill>
+                  <a:schemeClr val="tx1"/>
+                </a:solidFill>
+                <a:latin typeface="Raleway" pitchFamily="2" charset="77"/>
+                <a:cs typeface="Times New Roman" panose="02020603050405020304"/>
+              </a:rPr>
+              <a:t> page accounts for a notable share of traffic (12.1% of total views), likely influenced by paid campaigns. However, its moderate views per user (1.86) indicates that users primarily access it for specific information rather than prolonged engagement.</a:t>
+            </a:r>
+            <a:endParaRPr lang="en-US" altLang="en-US" sz="1000" spc="-10">
               <a:solidFill>
-                <a:srgbClr val="334154"/>
+                <a:schemeClr val="tx1"/>
               </a:solidFill>
               <a:latin typeface="Raleway" pitchFamily="2" charset="77"/>
-              <a:cs typeface="Times New Roman"/>
+              <a:cs typeface="Times New Roman" panose="02020603050405020304"/>
+            </a:endParaRPr>
+          </a:p>
+          <a:p>
+            <a:r>
+              <a:rPr lang="en-US" altLang="en-US" sz="1000" spc="-10">
+                <a:solidFill>
+                  <a:schemeClr val="tx1"/>
+                </a:solidFill>
+                <a:latin typeface="Raleway" pitchFamily="2" charset="77"/>
+                <a:cs typeface="Times New Roman" panose="02020603050405020304"/>
+              </a:rPr>
+              <a:t>The homepage (</a:t>
+            </a:r>
+            <a:r>
+              <a:rPr lang="en-US" altLang="en-US" sz="1000" i="1" spc="-10">
+                <a:solidFill>
+                  <a:schemeClr val="tx1"/>
+                </a:solidFill>
+                <a:latin typeface="Raleway" pitchFamily="2" charset="77"/>
+                <a:cs typeface="Times New Roman" panose="02020603050405020304"/>
+              </a:rPr>
+              <a:t>Econet Wireless Zimbabwe</a:t>
+            </a:r>
+            <a:r>
+              <a:rPr lang="en-US" altLang="en-US" sz="1000" spc="-10">
+                <a:solidFill>
+                  <a:schemeClr val="tx1"/>
+                </a:solidFill>
+                <a:latin typeface="Raleway" pitchFamily="2" charset="77"/>
+                <a:cs typeface="Times New Roman" panose="02020603050405020304"/>
+              </a:rPr>
+              <a:t>) remains the leading traffic driver, contributing the highest number of views (15.56%) and active users, confirming its role as the primary entry and navigation point.</a:t>
+            </a:r>
+            <a:endParaRPr lang="en-US" altLang="en-US" sz="1000" spc="-10">
+              <a:solidFill>
+                <a:schemeClr val="tx1"/>
+              </a:solidFill>
+              <a:latin typeface="Raleway" pitchFamily="2" charset="77"/>
+              <a:cs typeface="Times New Roman" panose="02020603050405020304"/>
+            </a:endParaRPr>
+          </a:p>
+          <a:p>
+            <a:r>
+              <a:rPr lang="en-US" altLang="en-US" sz="1000" spc="-10">
+                <a:solidFill>
+                  <a:schemeClr val="tx1"/>
+                </a:solidFill>
+                <a:latin typeface="Raleway" pitchFamily="2" charset="77"/>
+                <a:cs typeface="Times New Roman" panose="02020603050405020304"/>
+              </a:rPr>
+              <a:t>Product-related pages such as </a:t>
+            </a:r>
+            <a:r>
+              <a:rPr lang="en-US" altLang="en-US" sz="1000" i="1" spc="-10">
+                <a:solidFill>
+                  <a:schemeClr val="tx1"/>
+                </a:solidFill>
+                <a:latin typeface="Raleway" pitchFamily="2" charset="77"/>
+                <a:cs typeface="Times New Roman" panose="02020603050405020304"/>
+              </a:rPr>
+              <a:t>eSim </a:t>
+            </a:r>
+            <a:r>
+              <a:rPr lang="en-US" altLang="en-US" sz="1000" spc="-10">
+                <a:solidFill>
+                  <a:schemeClr val="tx1"/>
+                </a:solidFill>
+                <a:latin typeface="Raleway" pitchFamily="2" charset="77"/>
+                <a:cs typeface="Times New Roman" panose="02020603050405020304"/>
+              </a:rPr>
+              <a:t>(2.14 views per user –highest engagement), Devices (1.80), and USD Data Bundles (1.51) show stronger interaction patterns, suggesting higher user intent and deeper exploration of offerings.</a:t>
+            </a:r>
+            <a:endParaRPr lang="en-US" altLang="en-US" sz="1000" spc="-10">
+              <a:solidFill>
+                <a:schemeClr val="tx1"/>
+              </a:solidFill>
+              <a:latin typeface="Raleway" pitchFamily="2" charset="77"/>
+              <a:cs typeface="Times New Roman" panose="02020603050405020304"/>
+            </a:endParaRPr>
+          </a:p>
+          <a:p>
+            <a:r>
+              <a:rPr lang="en-US" altLang="en-US" sz="1000" spc="-10">
+                <a:solidFill>
+                  <a:schemeClr val="tx1"/>
+                </a:solidFill>
+                <a:latin typeface="Raleway" pitchFamily="2" charset="77"/>
+                <a:cs typeface="Times New Roman" panose="02020603050405020304"/>
+              </a:rPr>
+              <a:t>Support-focused pages including </a:t>
+            </a:r>
+            <a:r>
+              <a:rPr lang="en-US" altLang="en-US" sz="1000" i="1" spc="-10">
+                <a:solidFill>
+                  <a:schemeClr val="tx1"/>
+                </a:solidFill>
+                <a:latin typeface="Raleway" pitchFamily="2" charset="77"/>
+                <a:cs typeface="Times New Roman" panose="02020603050405020304"/>
+              </a:rPr>
+              <a:t>Contact Us </a:t>
+            </a:r>
+            <a:r>
+              <a:rPr lang="en-US" altLang="en-US" sz="1000" spc="-10">
+                <a:solidFill>
+                  <a:schemeClr val="tx1"/>
+                </a:solidFill>
+                <a:latin typeface="Raleway" pitchFamily="2" charset="77"/>
+                <a:cs typeface="Times New Roman" panose="02020603050405020304"/>
+              </a:rPr>
+              <a:t>and </a:t>
+            </a:r>
+            <a:r>
+              <a:rPr lang="en-US" altLang="en-US" sz="1000" i="1" spc="-10">
+                <a:solidFill>
+                  <a:schemeClr val="tx1"/>
+                </a:solidFill>
+                <a:latin typeface="Raleway" pitchFamily="2" charset="77"/>
+                <a:cs typeface="Times New Roman" panose="02020603050405020304"/>
+              </a:rPr>
+              <a:t>Customer Experience</a:t>
+            </a:r>
+            <a:r>
+              <a:rPr lang="en-US" altLang="en-US" sz="1000" spc="-10">
+                <a:solidFill>
+                  <a:schemeClr val="tx1"/>
+                </a:solidFill>
+                <a:latin typeface="Raleway" pitchFamily="2" charset="77"/>
+                <a:cs typeface="Times New Roman" panose="02020603050405020304"/>
+              </a:rPr>
+              <a:t> attract consistent traffic but exhibit lower engagement depth, indicating they are mainly used for quick access to assistance rather than extended browsing.</a:t>
+            </a:r>
+            <a:endParaRPr lang="en-US" altLang="en-US" sz="1000" spc="-10">
+              <a:solidFill>
+                <a:schemeClr val="tx1"/>
+              </a:solidFill>
+              <a:latin typeface="Raleway" pitchFamily="2" charset="77"/>
+              <a:cs typeface="Times New Roman" panose="02020603050405020304"/>
+            </a:endParaRPr>
+          </a:p>
+          <a:p>
+            <a:endParaRPr lang="en-US" altLang="en-US" sz="1000" spc="-10">
+              <a:solidFill>
+                <a:schemeClr val="tx1"/>
+              </a:solidFill>
+              <a:latin typeface="Raleway" pitchFamily="2" charset="77"/>
+              <a:cs typeface="Times New Roman" panose="02020603050405020304"/>
             </a:endParaRPr>
           </a:p>
         </p:txBody>
@@ -4759,28 +5420,22 @@
       </p:grpSp>
       <p:pic>
         <p:nvPicPr>
-          <p:cNvPr id="14" name="Picture 13" descr="A screenshot of a screen&#10;&#10;AI-generated content may be incorrect.">
-            <a:extLst>
-              <a:ext uri="{FF2B5EF4-FFF2-40B4-BE49-F238E27FC236}">
-                <a16:creationId xmlns:a16="http://schemas.microsoft.com/office/drawing/2014/main" id="{32ACB986-8E64-E0A4-69AE-FE07D29557FE}"/>
-              </a:ext>
-            </a:extLst>
-          </p:cNvPr>
+          <p:cNvPr id="11" name="Picture 10" descr="Screenshot 2026-03-30 at 09.45.18"/>
           <p:cNvPicPr>
             <a:picLocks noChangeAspect="1"/>
           </p:cNvPicPr>
           <p:nvPr/>
         </p:nvPicPr>
         <p:blipFill>
-          <a:blip r:embed="rId2"/>
+          <a:blip r:embed="rId1"/>
           <a:stretch>
             <a:fillRect/>
           </a:stretch>
         </p:blipFill>
         <p:spPr>
           <a:xfrm>
-            <a:off x="4252215" y="1628224"/>
-            <a:ext cx="4614040" cy="3028951"/>
+            <a:off x="4343400" y="1435100"/>
+            <a:ext cx="4345940" cy="3411220"/>
           </a:xfrm>
           <a:prstGeom prst="rect">
             <a:avLst/>
@@ -4860,7 +5515,7 @@
           <a:p>
             <a:endParaRPr>
               <a:latin typeface="Raleway" pitchFamily="2" charset="77"/>
-              <a:cs typeface="Times New Roman"/>
+              <a:cs typeface="Times New Roman" panose="02020603050405020304"/>
             </a:endParaRPr>
           </a:p>
         </p:txBody>
@@ -4901,24 +5556,28 @@
             <a:r>
               <a:rPr spc="65">
                 <a:latin typeface="Raleway" pitchFamily="2" charset="77"/>
-                <a:cs typeface="Times New Roman"/>
+                <a:cs typeface="Times New Roman" panose="02020603050405020304"/>
               </a:rPr>
               <a:t>Search</a:t>
             </a:r>
             <a:r>
               <a:rPr spc="-75">
                 <a:latin typeface="Raleway" pitchFamily="2" charset="77"/>
-                <a:cs typeface="Times New Roman"/>
+                <a:cs typeface="Times New Roman" panose="02020603050405020304"/>
               </a:rPr>
               <a:t> </a:t>
             </a:r>
             <a:r>
               <a:rPr spc="-10">
                 <a:latin typeface="Raleway" pitchFamily="2" charset="77"/>
-                <a:cs typeface="Times New Roman"/>
+                <a:cs typeface="Times New Roman" panose="02020603050405020304"/>
               </a:rPr>
               <a:t>Performance</a:t>
             </a:r>
+            <a:endParaRPr spc="-10">
+              <a:latin typeface="Raleway" pitchFamily="2" charset="77"/>
+              <a:cs typeface="Times New Roman" panose="02020603050405020304"/>
+            </a:endParaRPr>
           </a:p>
         </p:txBody>
       </p:sp>
@@ -4957,9 +5616,9 @@
                   <a:srgbClr val="334154"/>
                 </a:solidFill>
                 <a:latin typeface="Raleway" pitchFamily="2" charset="77"/>
-                <a:cs typeface="Times New Roman"/>
-              </a:rPr>
-              <a:t>Optimal search visibility and 6% Click-Through Rate.</a:t>
+                <a:cs typeface="Times New Roman" panose="02020603050405020304"/>
+              </a:rPr>
+              <a:t>Robust Search Visibility with 6% Click-Through Rate</a:t>
             </a:r>
           </a:p>
         </p:txBody>
@@ -4973,7 +5632,7 @@
         <p:spPr>
           <a:xfrm>
             <a:off x="248628" y="1380283"/>
-            <a:ext cx="3595578" cy="3231654"/>
+            <a:ext cx="3595578" cy="3077845"/>
           </a:xfrm>
           <a:prstGeom prst="rect">
             <a:avLst/>
@@ -4994,101 +5653,158 @@
           <a:lstStyle/>
           <a:p>
             <a:r>
-              <a:rPr lang="en-ZW" sz="1000" b="1">
-                <a:latin typeface="Raleway" pitchFamily="2" charset="77"/>
+              <a:rPr lang="en-US" altLang="en-US" sz="1000" spc="-10">
+                <a:solidFill>
+                  <a:schemeClr val="tx1"/>
+                </a:solidFill>
+                <a:latin typeface="Raleway" pitchFamily="2" charset="77"/>
+                <a:cs typeface="Times New Roman" panose="02020603050405020304"/>
+              </a:rPr>
+              <a:t>The brand achieved </a:t>
+            </a:r>
+            <a:r>
+              <a:rPr lang="en-US" altLang="en-US" sz="1000" spc="-10" b="1">
+                <a:solidFill>
+                  <a:schemeClr val="tx1"/>
+                </a:solidFill>
+                <a:latin typeface="Raleway" pitchFamily="2" charset="77"/>
+                <a:cs typeface="Times New Roman" panose="02020603050405020304"/>
               </a:rPr>
               <a:t>429K</a:t>
             </a:r>
             <a:r>
-              <a:rPr lang="en-ZW" sz="1000">
-                <a:latin typeface="Raleway" pitchFamily="2" charset="77"/>
-              </a:rPr>
-              <a:t> impressions showcase the brand's substantial search results presence, confirming strong keyword coverage and consistent discoverability. This visibility yielded </a:t>
-            </a:r>
-            <a:r>
-              <a:rPr lang="en-ZW" sz="1000" b="1">
-                <a:latin typeface="Raleway" pitchFamily="2" charset="77"/>
+              <a:rPr lang="en-US" altLang="en-US" sz="1000" spc="-10">
+                <a:solidFill>
+                  <a:schemeClr val="tx1"/>
+                </a:solidFill>
+                <a:latin typeface="Raleway" pitchFamily="2" charset="77"/>
+                <a:cs typeface="Times New Roman" panose="02020603050405020304"/>
+              </a:rPr>
+              <a:t> impressions, demonstrating substantial search presence, strong keyword coverage, and consistent discoverability. This visibility generated </a:t>
+            </a:r>
+            <a:r>
+              <a:rPr lang="en-US" altLang="en-US" sz="1000" spc="-10" b="1">
+                <a:solidFill>
+                  <a:schemeClr val="tx1"/>
+                </a:solidFill>
+                <a:latin typeface="Raleway" pitchFamily="2" charset="77"/>
+                <a:cs typeface="Times New Roman" panose="02020603050405020304"/>
               </a:rPr>
               <a:t>25.6K</a:t>
             </a:r>
             <a:r>
-              <a:rPr lang="en-ZW" sz="1000">
-                <a:latin typeface="Raleway" pitchFamily="2" charset="77"/>
-              </a:rPr>
-              <a:t> site clicks, reflecting meaningful traffic acquisition from search engines.</a:t>
-            </a:r>
-          </a:p>
-          <a:p>
-            <a:endParaRPr lang="en-ZW" sz="1000">
-              <a:latin typeface="Raleway" pitchFamily="2" charset="77"/>
-            </a:endParaRPr>
-          </a:p>
-          <a:p>
-            <a:r>
-              <a:rPr lang="en-ZW" sz="1000">
-                <a:latin typeface="Raleway" pitchFamily="2" charset="77"/>
-              </a:rPr>
-              <a:t>The </a:t>
-            </a:r>
-            <a:r>
-              <a:rPr lang="en-ZW" sz="1000" b="1">
-                <a:latin typeface="Raleway" pitchFamily="2" charset="77"/>
-              </a:rPr>
-              <a:t>6%</a:t>
-            </a:r>
-            <a:r>
-              <a:rPr lang="en-ZW" sz="1000">
-                <a:latin typeface="Raleway" pitchFamily="2" charset="77"/>
-              </a:rPr>
-              <a:t> click-through rate distinctly suggests strong conversion of impressions into clicks, reflecting compelling meta titles and descriptions that resonate with searcher intent.</a:t>
-            </a:r>
-          </a:p>
-          <a:p>
-            <a:r>
-              <a:rPr lang="en-ZW" sz="1000">
-                <a:latin typeface="Raleway" pitchFamily="2" charset="77"/>
-              </a:rPr>
-              <a:t>The average position of </a:t>
-            </a:r>
-            <a:r>
-              <a:rPr lang="en-ZW" sz="1000" b="1">
-                <a:latin typeface="Raleway" pitchFamily="2" charset="77"/>
-              </a:rPr>
-              <a:t>3.7</a:t>
-            </a:r>
-            <a:r>
-              <a:rPr lang="en-ZW" sz="1000">
-                <a:latin typeface="Raleway" pitchFamily="2" charset="77"/>
-              </a:rPr>
-              <a:t> is highly encouraging, placing the website on the first page of search results for many queries. This reinforces robust SEO foundations and strong competitive ranking.</a:t>
-            </a:r>
-          </a:p>
-          <a:p>
-            <a:endParaRPr lang="en-ZW" sz="1000">
-              <a:latin typeface="Raleway" pitchFamily="2" charset="77"/>
-            </a:endParaRPr>
-          </a:p>
-          <a:p>
-            <a:r>
-              <a:rPr lang="en-ZW" sz="1000">
-                <a:latin typeface="Raleway" pitchFamily="2" charset="77"/>
-              </a:rPr>
-              <a:t>Performance demonstrates relative stability across the period, marked by normal fluctuations without major declines, thereby reflecting consistent search demand and sustained visibility.</a:t>
-            </a:r>
-          </a:p>
-          <a:p>
-            <a:pPr algn="l">
-              <a:tabLst>
-                <a:tab pos="294640" algn="l"/>
-              </a:tabLst>
-            </a:pPr>
-            <a:endParaRPr lang="en-US" sz="1000" spc="-10">
+              <a:rPr lang="en-US" altLang="en-US" sz="1000" spc="-10">
+                <a:solidFill>
+                  <a:schemeClr val="tx1"/>
+                </a:solidFill>
+                <a:latin typeface="Raleway" pitchFamily="2" charset="77"/>
+                <a:cs typeface="Times New Roman" panose="02020603050405020304"/>
+              </a:rPr>
+              <a:t> clicks, reflecting meaningful traffic acquisition directly from search engines.</a:t>
+            </a:r>
+          </a:p>
+          <a:p>
+            <a:endParaRPr lang="en-US" altLang="en-US" sz="1000" spc="-10">
               <a:solidFill>
-                <a:srgbClr val="334154"/>
+                <a:schemeClr val="tx1"/>
               </a:solidFill>
               <a:latin typeface="Raleway" pitchFamily="2" charset="77"/>
-              <a:cs typeface="Times New Roman"/>
+              <a:cs typeface="Times New Roman" panose="02020603050405020304"/>
             </a:endParaRPr>
+          </a:p>
+          <a:p>
+            <a:r>
+              <a:rPr lang="en-US" altLang="en-US" sz="1000" spc="-10">
+                <a:solidFill>
+                  <a:schemeClr val="tx1"/>
+                </a:solidFill>
+                <a:latin typeface="Raleway" pitchFamily="2" charset="77"/>
+                <a:cs typeface="Times New Roman" panose="02020603050405020304"/>
+              </a:rPr>
+              <a:t>The </a:t>
+            </a:r>
+            <a:r>
+              <a:rPr lang="en-US" altLang="en-US" sz="1000" spc="-10" b="1">
+                <a:solidFill>
+                  <a:schemeClr val="tx1"/>
+                </a:solidFill>
+                <a:latin typeface="Raleway" pitchFamily="2" charset="77"/>
+                <a:cs typeface="Times New Roman" panose="02020603050405020304"/>
+              </a:rPr>
+              <a:t>6%</a:t>
+            </a:r>
+            <a:r>
+              <a:rPr lang="en-US" altLang="en-US" sz="1000" spc="-10">
+                <a:solidFill>
+                  <a:schemeClr val="tx1"/>
+                </a:solidFill>
+                <a:latin typeface="Raleway" pitchFamily="2" charset="77"/>
+                <a:cs typeface="Times New Roman" panose="02020603050405020304"/>
+              </a:rPr>
+              <a:t> click-through rate demonstrates robust conversion from impressions to clicks, indicating highly effective meta titles and descriptions that align with searcher intent.</a:t>
+            </a:r>
+          </a:p>
+          <a:p>
+            <a:endParaRPr lang="en-US" altLang="en-US" sz="1000" spc="-10">
+              <a:solidFill>
+                <a:schemeClr val="tx1"/>
+              </a:solidFill>
+              <a:latin typeface="Raleway" pitchFamily="2" charset="77"/>
+              <a:cs typeface="Times New Roman" panose="02020603050405020304"/>
+            </a:endParaRPr>
+          </a:p>
+          <a:p>
+            <a:r>
+              <a:rPr lang="en-US" altLang="en-US" sz="1000" spc="-10">
+                <a:solidFill>
+                  <a:schemeClr val="tx1"/>
+                </a:solidFill>
+                <a:latin typeface="Raleway" pitchFamily="2" charset="77"/>
+                <a:cs typeface="Times New Roman" panose="02020603050405020304"/>
+              </a:rPr>
+              <a:t>The average position of </a:t>
+            </a:r>
+            <a:r>
+              <a:rPr lang="en-US" altLang="en-US" sz="1000" spc="-10" b="1">
+                <a:solidFill>
+                  <a:schemeClr val="tx1"/>
+                </a:solidFill>
+                <a:latin typeface="Raleway" pitchFamily="2" charset="77"/>
+                <a:cs typeface="Times New Roman" panose="02020603050405020304"/>
+              </a:rPr>
+              <a:t>3.7</a:t>
+            </a:r>
+            <a:r>
+              <a:rPr lang="en-US" altLang="en-US" sz="1000" spc="-10">
+                <a:solidFill>
+                  <a:schemeClr val="tx1"/>
+                </a:solidFill>
+                <a:latin typeface="Raleway" pitchFamily="2" charset="77"/>
+                <a:cs typeface="Times New Roman" panose="02020603050405020304"/>
+              </a:rPr>
+              <a:t> is highly encouraging, consistently placing the website on the first page of search results for numerous queries. This demonstrates robust SEO foundations and significant competitive ranking strength.</a:t>
+            </a:r>
+          </a:p>
+          <a:p>
+            <a:endParaRPr lang="en-US" altLang="en-US" sz="1000" spc="-10">
+              <a:solidFill>
+                <a:schemeClr val="tx1"/>
+              </a:solidFill>
+              <a:latin typeface="Raleway" pitchFamily="2" charset="77"/>
+              <a:cs typeface="Times New Roman" panose="02020603050405020304"/>
+            </a:endParaRPr>
+          </a:p>
+          <a:p>
+            <a:r>
+              <a:rPr lang="en-US" altLang="en-US" sz="1000" spc="-10">
+                <a:solidFill>
+                  <a:schemeClr val="tx1"/>
+                </a:solidFill>
+                <a:latin typeface="Raleway" pitchFamily="2" charset="77"/>
+                <a:cs typeface="Times New Roman" panose="02020603050405020304"/>
+              </a:rPr>
+              <a:t>Performance remained relatively stable for the period, showing normal fluctuations without major declines, indicating consistent search demand and sustained visibility.</a:t>
+            </a:r>
           </a:p>
         </p:txBody>
       </p:sp>
@@ -5154,7 +5870,7 @@
             <a:p>
               <a:endParaRPr>
                 <a:latin typeface="Raleway" pitchFamily="2" charset="77"/>
-                <a:cs typeface="Times New Roman"/>
+                <a:cs typeface="Times New Roman" panose="02020603050405020304"/>
               </a:endParaRPr>
             </a:p>
           </p:txBody>
@@ -5209,7 +5925,7 @@
             <a:p>
               <a:endParaRPr>
                 <a:latin typeface="Raleway" pitchFamily="2" charset="77"/>
-                <a:cs typeface="Times New Roman"/>
+                <a:cs typeface="Times New Roman" panose="02020603050405020304"/>
               </a:endParaRPr>
             </a:p>
           </p:txBody>
@@ -5217,22 +5933,22 @@
       </p:grpSp>
       <p:pic>
         <p:nvPicPr>
-          <p:cNvPr id="9" name="Picture 8" descr="search_console.png"/>
+          <p:cNvPr id="9" name="Picture 8" descr="Screenshot 2026-03-30 at 09.56.07"/>
           <p:cNvPicPr>
             <a:picLocks noChangeAspect="1"/>
           </p:cNvPicPr>
           <p:nvPr/>
         </p:nvPicPr>
         <p:blipFill>
-          <a:blip r:embed="rId3"/>
+          <a:blip r:embed="rId1"/>
           <a:stretch>
             <a:fillRect/>
           </a:stretch>
         </p:blipFill>
         <p:spPr>
           <a:xfrm>
-            <a:off x="4066198" y="1942191"/>
-            <a:ext cx="4504610" cy="2333923"/>
+            <a:off x="4038600" y="2193925"/>
+            <a:ext cx="4474845" cy="1357630"/>
           </a:xfrm>
           <a:prstGeom prst="rect">
             <a:avLst/>
@@ -5300,10 +6016,14 @@
             <a:r>
               <a:rPr spc="60">
                 <a:latin typeface="Raleway" pitchFamily="2" charset="77"/>
-                <a:cs typeface="Times New Roman"/>
+                <a:cs typeface="Times New Roman" panose="02020603050405020304"/>
               </a:rPr>
               <a:t>Recommendations</a:t>
             </a:r>
+            <a:endParaRPr spc="60">
+              <a:latin typeface="Raleway" pitchFamily="2" charset="77"/>
+              <a:cs typeface="Times New Roman" panose="02020603050405020304"/>
+            </a:endParaRPr>
           </a:p>
         </p:txBody>
       </p:sp>
@@ -5339,7 +6059,7 @@
                   <a:srgbClr val="334154"/>
                 </a:solidFill>
                 <a:latin typeface="Raleway" pitchFamily="2" charset="77"/>
-                <a:cs typeface="Times New Roman"/>
+                <a:cs typeface="Times New Roman" panose="02020603050405020304"/>
               </a:rPr>
               <a:t>Three Key </a:t>
             </a:r>
@@ -5349,7 +6069,7 @@
                   <a:srgbClr val="334154"/>
                 </a:solidFill>
                 <a:latin typeface="Raleway" pitchFamily="2" charset="77"/>
-                <a:cs typeface="Times New Roman"/>
+                <a:cs typeface="Times New Roman" panose="02020603050405020304"/>
               </a:rPr>
               <a:t>Initiatives</a:t>
             </a:r>
@@ -5359,7 +6079,7 @@
                   <a:srgbClr val="334154"/>
                 </a:solidFill>
                 <a:latin typeface="Raleway" pitchFamily="2" charset="77"/>
-                <a:cs typeface="Times New Roman"/>
+                <a:cs typeface="Times New Roman" panose="02020603050405020304"/>
               </a:rPr>
               <a:t> </a:t>
             </a:r>
@@ -5369,7 +6089,7 @@
                   <a:srgbClr val="334154"/>
                 </a:solidFill>
                 <a:latin typeface="Raleway" pitchFamily="2" charset="77"/>
-                <a:cs typeface="Times New Roman"/>
+                <a:cs typeface="Times New Roman" panose="02020603050405020304"/>
               </a:rPr>
               <a:t>to</a:t>
             </a:r>
@@ -5379,7 +6099,7 @@
                   <a:srgbClr val="334154"/>
                 </a:solidFill>
                 <a:latin typeface="Raleway" pitchFamily="2" charset="77"/>
-                <a:cs typeface="Times New Roman"/>
+                <a:cs typeface="Times New Roman" panose="02020603050405020304"/>
               </a:rPr>
               <a:t> </a:t>
             </a:r>
@@ -5389,7 +6109,7 @@
                   <a:srgbClr val="334154"/>
                 </a:solidFill>
                 <a:latin typeface="Raleway" pitchFamily="2" charset="77"/>
-                <a:cs typeface="Times New Roman"/>
+                <a:cs typeface="Times New Roman" panose="02020603050405020304"/>
               </a:rPr>
               <a:t>Enhance </a:t>
             </a:r>
@@ -5399,13 +6119,13 @@
                   <a:srgbClr val="334154"/>
                 </a:solidFill>
                 <a:latin typeface="Raleway" pitchFamily="2" charset="77"/>
-                <a:cs typeface="Times New Roman"/>
+                <a:cs typeface="Times New Roman" panose="02020603050405020304"/>
               </a:rPr>
               <a:t>Performance</a:t>
             </a:r>
             <a:endParaRPr sz="1300">
               <a:latin typeface="Raleway" pitchFamily="2" charset="77"/>
-              <a:cs typeface="Times New Roman"/>
+              <a:cs typeface="Times New Roman" panose="02020603050405020304"/>
             </a:endParaRPr>
           </a:p>
         </p:txBody>
@@ -5472,7 +6192,7 @@
             <a:p>
               <a:endParaRPr>
                 <a:latin typeface="Raleway" pitchFamily="2" charset="77"/>
-                <a:cs typeface="Times New Roman"/>
+                <a:cs typeface="Times New Roman" panose="02020603050405020304"/>
               </a:endParaRPr>
             </a:p>
           </p:txBody>
@@ -5525,7 +6245,7 @@
             <a:p>
               <a:endParaRPr>
                 <a:latin typeface="Raleway" pitchFamily="2" charset="77"/>
-                <a:cs typeface="Times New Roman"/>
+                <a:cs typeface="Times New Roman" panose="02020603050405020304"/>
               </a:endParaRPr>
             </a:p>
           </p:txBody>
@@ -5539,8 +6259,8 @@
         </p:nvSpPr>
         <p:spPr>
           <a:xfrm>
-            <a:off x="388183" y="1200784"/>
-            <a:ext cx="4873562" cy="3554177"/>
+            <a:off x="240030" y="1217295"/>
+            <a:ext cx="5195570" cy="3475990"/>
           </a:xfrm>
           <a:prstGeom prst="rect">
             <a:avLst/>
@@ -5552,7 +6272,8 @@
           </a:bodyPr>
           <a:lstStyle/>
           <a:p>
-            <a:pPr algn="l" hangingPunct="0">
+            <a:pPr marL="228600" indent="-228600" algn="l" hangingPunct="0">
+              <a:buAutoNum type="arabicPeriod"/>
               <a:defRPr sz="1800" b="0" i="0" u="none" strike="noStrike" kern="0" cap="none" spc="0" baseline="0">
                 <a:solidFill>
                   <a:srgbClr val="000000"/>
@@ -5561,27 +6282,27 @@
               </a:defRPr>
             </a:pPr>
             <a:r>
-              <a:rPr lang="en-US" sz="1000" b="1">
+              <a:rPr lang="en-US" altLang="en-US" sz="900" b="1">
                 <a:solidFill>
                   <a:srgbClr val="000000"/>
                 </a:solidFill>
-                <a:latin typeface="Raleway"/>
+                <a:latin typeface="Raleway" pitchFamily="2" charset="77"/>
                 <a:ea typeface="Calibri"/>
                 <a:cs typeface="Calibri"/>
               </a:rPr>
-              <a:t>1. Cross-Site Promotion</a:t>
-            </a:r>
-            <a:endParaRPr lang="en-US" sz="1000">
+              <a:t>Cross-Site Promotion</a:t>
+            </a:r>
+            <a:endParaRPr lang="en-US" altLang="en-US" sz="900" b="1">
               <a:solidFill>
                 <a:srgbClr val="000000"/>
               </a:solidFill>
-              <a:latin typeface="Raleway"/>
+              <a:latin typeface="Raleway" pitchFamily="2" charset="77"/>
               <a:ea typeface="Calibri"/>
               <a:cs typeface="Calibri"/>
             </a:endParaRPr>
           </a:p>
           <a:p>
-            <a:pPr algn="l">
+            <a:pPr algn="l" hangingPunct="0">
               <a:defRPr sz="1800" b="0" i="0" u="none" strike="noStrike" kern="0" cap="none" spc="0" baseline="0">
                 <a:solidFill>
                   <a:srgbClr val="000000"/>
@@ -5590,25 +6311,28 @@
               </a:defRPr>
             </a:pPr>
             <a:r>
-              <a:rPr lang="en-US" sz="1000">
+              <a:rPr lang="en-US" altLang="en-US" sz="900">
                 <a:solidFill>
                   <a:srgbClr val="000000"/>
                 </a:solidFill>
-                <a:latin typeface="Raleway"/>
+                <a:latin typeface="Raleway" pitchFamily="2" charset="77"/>
                 <a:ea typeface="Calibri"/>
                 <a:cs typeface="Calibri"/>
               </a:rPr>
-              <a:t>We recommend adding the new shop should on the EWZ website via the following: </a:t>
-            </a:r>
-            <a:endParaRPr lang="en-US" sz="1000">
-              <a:latin typeface="Raleway"/>
+              <a:t>We recommend strengthening the online shop on the EWZ website via the following:</a:t>
+            </a:r>
+            <a:endParaRPr lang="en-US" altLang="en-US" sz="900">
+              <a:solidFill>
+                <a:srgbClr val="000000"/>
+              </a:solidFill>
+              <a:latin typeface="Raleway" pitchFamily="2" charset="77"/>
               <a:ea typeface="Calibri"/>
               <a:cs typeface="Calibri"/>
             </a:endParaRPr>
           </a:p>
           <a:p>
-            <a:pPr marL="171450" indent="-171450" algn="l">
-              <a:buFont typeface="Arial"/>
+            <a:pPr marL="171450" indent="-171450" algn="l" hangingPunct="0">
+              <a:buFont typeface="Arial" panose="020B0704020202020204" pitchFamily="34" charset="0"/>
               <a:buChar char="•"/>
               <a:defRPr sz="1800" b="0" i="0" u="none" strike="noStrike" kern="0" cap="none" spc="0" baseline="0">
                 <a:solidFill>
@@ -5618,20 +6342,28 @@
               </a:defRPr>
             </a:pPr>
             <a:r>
-              <a:rPr lang="en-US" sz="1000">
+              <a:rPr lang="en-US" altLang="en-US" sz="900">
                 <a:solidFill>
                   <a:srgbClr val="000000"/>
                 </a:solidFill>
-                <a:latin typeface="Raleway"/>
+                <a:latin typeface="Raleway" pitchFamily="2" charset="77"/>
                 <a:ea typeface="Calibri"/>
                 <a:cs typeface="Calibri"/>
               </a:rPr>
-              <a:t>Feature devices on the homepage banner  with redirecting CTAs </a:t>
-            </a:r>
-          </a:p>
-          <a:p>
-            <a:pPr marL="171450" indent="-171450" algn="l">
-              <a:buFont typeface="Arial"/>
+              <a:t>Feature devices and shop-led offers on the homepage banner with stronger redirecting CTAs.</a:t>
+            </a:r>
+            <a:endParaRPr lang="en-US" altLang="en-US" sz="900">
+              <a:solidFill>
+                <a:srgbClr val="000000"/>
+              </a:solidFill>
+              <a:latin typeface="Raleway" pitchFamily="2" charset="77"/>
+              <a:ea typeface="Calibri"/>
+              <a:cs typeface="Calibri"/>
+            </a:endParaRPr>
+          </a:p>
+          <a:p>
+            <a:pPr marL="171450" indent="-171450" algn="l" hangingPunct="0">
+              <a:buFont typeface="Arial" panose="020B0704020202020204" pitchFamily="34" charset="0"/>
               <a:buChar char="•"/>
               <a:defRPr sz="1800" b="0" i="0" u="none" strike="noStrike" kern="0" cap="none" spc="0" baseline="0">
                 <a:solidFill>
@@ -5641,23 +6373,28 @@
               </a:defRPr>
             </a:pPr>
             <a:r>
-              <a:rPr lang="en-US" sz="1000">
+              <a:rPr lang="en-US" altLang="en-US" sz="900">
                 <a:solidFill>
                   <a:srgbClr val="000000"/>
                 </a:solidFill>
-                <a:latin typeface="Raleway"/>
+                <a:latin typeface="Raleway" pitchFamily="2" charset="77"/>
                 <a:ea typeface="Calibri"/>
                 <a:cs typeface="Calibri"/>
               </a:rPr>
-              <a:t>We propose linking out to the shop in social bios (Facebook, X, Instagram).</a:t>
-            </a:r>
-            <a:endParaRPr lang="en-US" sz="1000">
-              <a:latin typeface="Raleway"/>
+              <a:t>We propose adding more shop entry points across key EWZ pages such as Devices, 5G, bundles, and support pages.</a:t>
+            </a:r>
+            <a:endParaRPr lang="en-US" altLang="en-US" sz="900">
+              <a:solidFill>
+                <a:srgbClr val="000000"/>
+              </a:solidFill>
+              <a:latin typeface="Raleway" pitchFamily="2" charset="77"/>
+              <a:ea typeface="Calibri"/>
+              <a:cs typeface="Calibri"/>
             </a:endParaRPr>
           </a:p>
           <a:p>
-            <a:pPr marL="171450" indent="-171450" algn="l">
-              <a:buFont typeface="Arial"/>
+            <a:pPr marL="171450" indent="-171450" algn="l" hangingPunct="0">
+              <a:buFont typeface="Arial" panose="020B0704020202020204" pitchFamily="34" charset="0"/>
               <a:buChar char="•"/>
               <a:defRPr sz="1800" b="0" i="0" u="none" strike="noStrike" kern="0" cap="none" spc="0" baseline="0">
                 <a:solidFill>
@@ -5667,23 +6404,28 @@
               </a:defRPr>
             </a:pPr>
             <a:r>
-              <a:rPr lang="en-US" sz="1000">
+              <a:rPr lang="en-US" altLang="en-US" sz="900">
                 <a:solidFill>
                   <a:srgbClr val="000000"/>
                 </a:solidFill>
-                <a:latin typeface="Raleway"/>
+                <a:latin typeface="Raleway" pitchFamily="2" charset="77"/>
                 <a:ea typeface="Calibri"/>
                 <a:cs typeface="Calibri"/>
               </a:rPr>
-              <a:t>Email newsletters to existing customers.</a:t>
-            </a:r>
-            <a:endParaRPr lang="en-US" sz="1000">
-              <a:latin typeface="Raleway"/>
+              <a:t>Promotional placements on the EWZ website should guide users from product interest into purchase intent.</a:t>
+            </a:r>
+            <a:endParaRPr lang="en-US" altLang="en-US" sz="900">
+              <a:solidFill>
+                <a:srgbClr val="000000"/>
+              </a:solidFill>
+              <a:latin typeface="Raleway" pitchFamily="2" charset="77"/>
+              <a:ea typeface="Calibri"/>
+              <a:cs typeface="Calibri"/>
             </a:endParaRPr>
           </a:p>
           <a:p>
-            <a:pPr marL="171450" indent="-171450" algn="l">
-              <a:buFont typeface="Arial"/>
+            <a:pPr marL="171450" indent="-171450" algn="l" hangingPunct="0">
+              <a:buFont typeface="Arial" panose="020B0704020202020204" pitchFamily="34" charset="0"/>
               <a:buChar char="•"/>
               <a:defRPr sz="1800" b="0" i="0" u="none" strike="noStrike" kern="0" cap="none" spc="0" baseline="0">
                 <a:solidFill>
@@ -5693,46 +6435,27 @@
               </a:defRPr>
             </a:pPr>
             <a:r>
-              <a:rPr lang="en-US" sz="1000">
+              <a:rPr lang="en-US" altLang="en-US" sz="900">
                 <a:solidFill>
                   <a:srgbClr val="000000"/>
                 </a:solidFill>
-                <a:latin typeface="Raleway"/>
+                <a:latin typeface="Raleway" pitchFamily="2" charset="77"/>
                 <a:ea typeface="Calibri"/>
                 <a:cs typeface="Calibri"/>
               </a:rPr>
-              <a:t>In the </a:t>
-            </a:r>
-            <a:r>
-              <a:rPr lang="en-US" sz="1000" b="1">
-                <a:solidFill>
-                  <a:srgbClr val="000000"/>
-                </a:solidFill>
-                <a:latin typeface="Raleway"/>
-                <a:ea typeface="Calibri"/>
-                <a:cs typeface="Calibri"/>
-              </a:rPr>
-              <a:t>My Econet app</a:t>
-            </a:r>
-            <a:r>
-              <a:rPr lang="en-US" sz="1000">
-                <a:solidFill>
-                  <a:srgbClr val="000000"/>
-                </a:solidFill>
-                <a:latin typeface="Raleway"/>
-                <a:ea typeface="Calibri"/>
-                <a:cs typeface="Calibri"/>
-              </a:rPr>
-              <a:t> (where existing users already engage).</a:t>
-            </a:r>
-            <a:endParaRPr lang="en-US" sz="1000">
-              <a:latin typeface="Raleway"/>
+              <a:t>Internal links from econet.co.zw will also help push more traffic and visibility to the shop.</a:t>
+            </a:r>
+            <a:endParaRPr lang="en-US" altLang="en-US" sz="900">
+              <a:solidFill>
+                <a:srgbClr val="000000"/>
+              </a:solidFill>
+              <a:latin typeface="Raleway" pitchFamily="2" charset="77"/>
+              <a:ea typeface="Calibri"/>
+              <a:cs typeface="Calibri"/>
             </a:endParaRPr>
           </a:p>
           <a:p>
-            <a:pPr marL="171450" indent="-171450" algn="l">
-              <a:buFont typeface="Arial"/>
-              <a:buChar char="•"/>
+            <a:pPr algn="l" hangingPunct="0">
               <a:defRPr sz="1800" b="0" i="0" u="none" strike="noStrike" kern="0" cap="none" spc="0" baseline="0">
                 <a:solidFill>
                   <a:srgbClr val="000000"/>
@@ -5741,22 +6464,27 @@
               </a:defRPr>
             </a:pPr>
             <a:r>
-              <a:rPr lang="en-US" sz="1000">
+              <a:rPr lang="en-US" altLang="en-US" sz="900" b="1">
                 <a:solidFill>
                   <a:srgbClr val="000000"/>
                 </a:solidFill>
-                <a:latin typeface="Raleway"/>
+                <a:latin typeface="Raleway" pitchFamily="2" charset="77"/>
                 <a:ea typeface="Calibri"/>
                 <a:cs typeface="Calibri"/>
               </a:rPr>
-              <a:t>Internal links from econet.co.zw help Google discover and rank the shop.</a:t>
-            </a:r>
-            <a:endParaRPr lang="en-US" sz="1000">
-              <a:latin typeface="Raleway"/>
+              <a:t>2. Content Placement on EWZ</a:t>
+            </a:r>
+            <a:endParaRPr lang="en-US" altLang="en-US" sz="900" b="1">
+              <a:solidFill>
+                <a:srgbClr val="000000"/>
+              </a:solidFill>
+              <a:latin typeface="Raleway" pitchFamily="2" charset="77"/>
+              <a:ea typeface="Calibri"/>
+              <a:cs typeface="Calibri"/>
             </a:endParaRPr>
           </a:p>
           <a:p>
-            <a:pPr algn="l">
+            <a:pPr algn="l" hangingPunct="0">
               <a:defRPr sz="1800" b="0" i="0" u="none" strike="noStrike" kern="0" cap="none" spc="0" baseline="0">
                 <a:solidFill>
                   <a:srgbClr val="000000"/>
@@ -5764,17 +6492,30 @@
                 <a:uFillTx/>
               </a:defRPr>
             </a:pPr>
-            <a:endParaRPr lang="en-US" sz="1000">
+            <a:r>
+              <a:rPr lang="en-US" altLang="en-US" sz="900">
+                <a:solidFill>
+                  <a:srgbClr val="000000"/>
+                </a:solidFill>
+                <a:latin typeface="Raleway" pitchFamily="2" charset="77"/>
+                <a:ea typeface="Calibri"/>
+                <a:cs typeface="Calibri"/>
+              </a:rPr>
+              <a:t>We recommend using the EWZ website more intentionally as the main discovery platform for device-related demand.</a:t>
+            </a:r>
+            <a:endParaRPr lang="en-US" altLang="en-US" sz="900">
               <a:solidFill>
                 <a:srgbClr val="000000"/>
               </a:solidFill>
-              <a:latin typeface="Raleway"/>
+              <a:latin typeface="Raleway" pitchFamily="2" charset="77"/>
               <a:ea typeface="Calibri"/>
               <a:cs typeface="Calibri"/>
             </a:endParaRPr>
           </a:p>
           <a:p>
-            <a:pPr algn="l">
+            <a:pPr marL="171450" indent="-171450" algn="l" hangingPunct="0">
+              <a:buFont typeface="Arial" panose="020B0704020202020204" pitchFamily="34" charset="0"/>
+              <a:buChar char="•"/>
               <a:defRPr sz="1800" b="0" i="0" u="none" strike="noStrike" kern="0" cap="none" spc="0" baseline="0">
                 <a:solidFill>
                   <a:srgbClr val="000000"/>
@@ -5783,22 +6524,29 @@
               </a:defRPr>
             </a:pPr>
             <a:r>
-              <a:rPr lang="en-US" sz="1000" b="1">
+              <a:rPr lang="en-US" altLang="en-US" sz="900">
                 <a:solidFill>
                   <a:srgbClr val="000000"/>
                 </a:solidFill>
-                <a:latin typeface="Raleway"/>
+                <a:latin typeface="Raleway" pitchFamily="2" charset="77"/>
                 <a:ea typeface="Calibri"/>
                 <a:cs typeface="Calibri"/>
               </a:rPr>
-              <a:t>2. Technical SEO (Foundational)</a:t>
-            </a:r>
-            <a:endParaRPr lang="en-US" sz="1000">
-              <a:latin typeface="Raleway"/>
+              <a:t>Build homepage sections, landing-page blocks, and campaign content around themes like smartphones, 5G-ready devices, home Wi-Fi solutions, and accessory offers.</a:t>
+            </a:r>
+            <a:endParaRPr lang="en-US" altLang="en-US" sz="900">
+              <a:solidFill>
+                <a:srgbClr val="000000"/>
+              </a:solidFill>
+              <a:latin typeface="Raleway" pitchFamily="2" charset="77"/>
+              <a:ea typeface="Calibri"/>
+              <a:cs typeface="Calibri"/>
             </a:endParaRPr>
           </a:p>
           <a:p>
-            <a:pPr algn="l">
+            <a:pPr marL="171450" indent="-171450" algn="l" hangingPunct="0">
+              <a:buFont typeface="Arial" panose="020B0704020202020204" pitchFamily="34" charset="0"/>
+              <a:buChar char="•"/>
               <a:defRPr sz="1800" b="0" i="0" u="none" strike="noStrike" kern="0" cap="none" spc="0" baseline="0">
                 <a:solidFill>
                   <a:srgbClr val="000000"/>
@@ -5807,23 +6555,28 @@
               </a:defRPr>
             </a:pPr>
             <a:r>
-              <a:rPr lang="en-US" sz="1000">
+              <a:rPr lang="en-US" altLang="en-US" sz="900">
                 <a:solidFill>
                   <a:srgbClr val="000000"/>
                 </a:solidFill>
-                <a:latin typeface="Raleway"/>
+                <a:latin typeface="Raleway" pitchFamily="2" charset="77"/>
                 <a:ea typeface="Calibri"/>
                 <a:cs typeface="Calibri"/>
               </a:rPr>
-              <a:t>Sitemap submission to Search Console + Bing Webmaster of the onlineshop.econet.co.zw domain</a:t>
-            </a:r>
-            <a:endParaRPr lang="en-US" sz="1000">
-              <a:latin typeface="Raleway"/>
+              <a:t>We propose linking these areas directly to the relevant shop pages instead of relying only on a general Shop Now button.</a:t>
+            </a:r>
+            <a:endParaRPr lang="en-US" altLang="en-US" sz="900">
+              <a:solidFill>
+                <a:srgbClr val="000000"/>
+              </a:solidFill>
+              <a:latin typeface="Raleway" pitchFamily="2" charset="77"/>
+              <a:ea typeface="Calibri"/>
+              <a:cs typeface="Calibri"/>
             </a:endParaRPr>
           </a:p>
           <a:p>
-            <a:pPr algn="l">
-              <a:buFont typeface="Arial"/>
+            <a:pPr marL="171450" indent="-171450" algn="l" hangingPunct="0">
+              <a:buFont typeface="Arial" panose="020B0704020202020204" pitchFamily="34" charset="0"/>
               <a:buChar char="•"/>
               <a:defRPr sz="1800" b="0" i="0" u="none" strike="noStrike" kern="0" cap="none" spc="0" baseline="0">
                 <a:solidFill>
@@ -5832,17 +6585,28 @@
                 <a:uFillTx/>
               </a:defRPr>
             </a:pPr>
-            <a:endParaRPr lang="en-US" sz="1000">
+            <a:r>
+              <a:rPr lang="en-US" altLang="en-US" sz="900">
+                <a:solidFill>
+                  <a:srgbClr val="000000"/>
+                </a:solidFill>
+                <a:latin typeface="Raleway" pitchFamily="2" charset="77"/>
+                <a:ea typeface="Calibri"/>
+                <a:cs typeface="Calibri"/>
+              </a:rPr>
+              <a:t>This will help EWZ do more of the awareness and consideration work before users reach the estore.</a:t>
+            </a:r>
+            <a:endParaRPr lang="en-US" altLang="en-US" sz="900">
               <a:solidFill>
                 <a:srgbClr val="000000"/>
               </a:solidFill>
-              <a:latin typeface="Raleway"/>
+              <a:latin typeface="Raleway" pitchFamily="2" charset="77"/>
               <a:ea typeface="Calibri"/>
               <a:cs typeface="Calibri"/>
             </a:endParaRPr>
           </a:p>
           <a:p>
-            <a:pPr algn="l">
+            <a:pPr algn="l" hangingPunct="0">
               <a:defRPr sz="1800" b="0" i="0" u="none" strike="noStrike" kern="0" cap="none" spc="0" baseline="0">
                 <a:solidFill>
                   <a:srgbClr val="000000"/>
@@ -5851,24 +6615,27 @@
               </a:defRPr>
             </a:pPr>
             <a:r>
-              <a:rPr lang="en-US" sz="1000" b="1">
+              <a:rPr lang="en-US" altLang="en-US" sz="900" b="1">
                 <a:solidFill>
                   <a:srgbClr val="000000"/>
                 </a:solidFill>
-                <a:latin typeface="Raleway"/>
+                <a:latin typeface="Raleway" pitchFamily="2" charset="77"/>
                 <a:ea typeface="Calibri"/>
                 <a:cs typeface="Calibri"/>
               </a:rPr>
-              <a:t>2. Keyword Strategy (What People Actually Search)</a:t>
-            </a:r>
-            <a:endParaRPr lang="en-US" sz="1000">
-              <a:latin typeface="Raleway"/>
+              <a:t>3. Messaging Strategy on EWZ</a:t>
+            </a:r>
+            <a:endParaRPr lang="en-US" altLang="en-US" sz="900" b="1">
+              <a:solidFill>
+                <a:srgbClr val="000000"/>
+              </a:solidFill>
+              <a:latin typeface="Raleway" pitchFamily="2" charset="77"/>
+              <a:ea typeface="Calibri"/>
+              <a:cs typeface="Calibri"/>
             </a:endParaRPr>
           </a:p>
           <a:p>
-            <a:pPr marL="171450" indent="-171450" algn="l">
-              <a:buFont typeface="Arial"/>
-              <a:buChar char="•"/>
+            <a:pPr algn="l" hangingPunct="0">
               <a:defRPr sz="1800" b="0" i="0" u="none" strike="noStrike" kern="0" cap="none" spc="0" baseline="0">
                 <a:solidFill>
                   <a:srgbClr val="000000"/>
@@ -5877,88 +6644,27 @@
               </a:defRPr>
             </a:pPr>
             <a:r>
-              <a:rPr lang="en-US" sz="1000">
+              <a:rPr lang="en-US" altLang="en-US" sz="900">
                 <a:solidFill>
                   <a:srgbClr val="000000"/>
                 </a:solidFill>
-                <a:latin typeface="Raleway"/>
+                <a:latin typeface="Raleway" pitchFamily="2" charset="77"/>
                 <a:ea typeface="Calibri"/>
                 <a:cs typeface="Calibri"/>
               </a:rPr>
-              <a:t>Right now, google shows the main Econet corporate site, not the shop, because the ecommerce isn’t integrated deeply with the main site and likely not SEO optimized. We recommend </a:t>
-            </a:r>
-            <a:r>
-              <a:rPr lang="en-US" sz="1000" err="1">
-                <a:solidFill>
-                  <a:srgbClr val="000000"/>
-                </a:solidFill>
-                <a:latin typeface="Raleway"/>
-                <a:ea typeface="Calibri"/>
-                <a:cs typeface="Calibri"/>
-              </a:rPr>
-              <a:t>embeding</a:t>
-            </a:r>
-            <a:r>
-              <a:rPr lang="en-US" sz="1000">
-                <a:solidFill>
-                  <a:srgbClr val="000000"/>
-                </a:solidFill>
-                <a:latin typeface="Raleway"/>
-                <a:ea typeface="Calibri"/>
-                <a:cs typeface="Calibri"/>
-              </a:rPr>
-              <a:t> </a:t>
-            </a:r>
-            <a:r>
-              <a:rPr lang="en-US" sz="1000" i="1">
-                <a:solidFill>
-                  <a:srgbClr val="000000"/>
-                </a:solidFill>
-                <a:latin typeface="Raleway"/>
-                <a:ea typeface="Calibri"/>
-                <a:cs typeface="Calibri"/>
-              </a:rPr>
-              <a:t>priority keywords/phrases</a:t>
-            </a:r>
-            <a:r>
-              <a:rPr lang="en-US" sz="1000">
-                <a:solidFill>
-                  <a:srgbClr val="000000"/>
-                </a:solidFill>
-                <a:latin typeface="Raleway"/>
-                <a:ea typeface="Calibri"/>
-                <a:cs typeface="Calibri"/>
-              </a:rPr>
-              <a:t> on the shop </a:t>
-            </a:r>
-            <a:r>
-              <a:rPr lang="en-US" sz="1000" err="1">
-                <a:solidFill>
-                  <a:srgbClr val="000000"/>
-                </a:solidFill>
-                <a:latin typeface="Raleway"/>
-                <a:ea typeface="Calibri"/>
-                <a:cs typeface="Calibri"/>
-              </a:rPr>
-              <a:t>e.g</a:t>
-            </a:r>
-            <a:r>
-              <a:rPr lang="en-US" sz="1000">
-                <a:solidFill>
-                  <a:srgbClr val="000000"/>
-                </a:solidFill>
-                <a:latin typeface="Raleway"/>
-                <a:ea typeface="Calibri"/>
-                <a:cs typeface="Calibri"/>
-              </a:rPr>
-              <a:t>:</a:t>
-            </a:r>
-            <a:endParaRPr lang="en-US" sz="1000">
-              <a:latin typeface="Raleway"/>
+              <a:t>Right now, the EWZ website already points to the shop, but the messaging can do more to drive user action. We recommend embedding stronger purchase-led wording across the main site e.g:</a:t>
+            </a:r>
+            <a:endParaRPr lang="en-US" altLang="en-US" sz="900">
+              <a:solidFill>
+                <a:srgbClr val="000000"/>
+              </a:solidFill>
+              <a:latin typeface="Raleway" pitchFamily="2" charset="77"/>
+              <a:ea typeface="Calibri"/>
+              <a:cs typeface="Calibri"/>
             </a:endParaRPr>
           </a:p>
           <a:p>
-            <a:pPr algn="l">
+            <a:pPr algn="l" hangingPunct="0">
               <a:defRPr sz="1800" b="0" i="0" u="none" strike="noStrike" kern="0" cap="none" spc="0" baseline="0">
                 <a:solidFill>
                   <a:srgbClr val="000000"/>
@@ -5967,33 +6673,49 @@
               </a:defRPr>
             </a:pPr>
             <a:r>
-              <a:rPr lang="en-US" sz="1000" b="1">
+              <a:rPr lang="en-US" altLang="en-US" sz="900">
                 <a:solidFill>
                   <a:srgbClr val="000000"/>
                 </a:solidFill>
-                <a:latin typeface="Raleway"/>
+                <a:latin typeface="Raleway" pitchFamily="2" charset="77"/>
                 <a:ea typeface="Calibri"/>
                 <a:cs typeface="Calibri"/>
               </a:rPr>
-              <a:t>Primary&gt;&gt; </a:t>
-            </a:r>
-            <a:r>
-              <a:rPr lang="en-US" sz="1000">
+              <a:t> </a:t>
+            </a:r>
+            <a:r>
+              <a:rPr lang="en-US" altLang="en-US" sz="900" b="1">
                 <a:solidFill>
                   <a:srgbClr val="000000"/>
                 </a:solidFill>
-                <a:latin typeface="Raleway"/>
+                <a:latin typeface="Raleway" pitchFamily="2" charset="77"/>
                 <a:ea typeface="Calibri"/>
                 <a:cs typeface="Calibri"/>
               </a:rPr>
-              <a:t>“Econet online shop”, “Econet shop online Zimbabwe”, “Buy Econet phones online”</a:t>
-            </a:r>
-            <a:endParaRPr lang="en-US" sz="1000">
-              <a:latin typeface="Raleway"/>
+              <a:t>Primary &gt;&gt;</a:t>
+            </a:r>
+            <a:r>
+              <a:rPr lang="en-US" altLang="en-US" sz="900">
+                <a:solidFill>
+                  <a:srgbClr val="000000"/>
+                </a:solidFill>
+                <a:latin typeface="Raleway" pitchFamily="2" charset="77"/>
+                <a:ea typeface="Calibri"/>
+                <a:cs typeface="Calibri"/>
+              </a:rPr>
+              <a:t> Shop devices online, Buy phones on Econet, Explore router deals.</a:t>
+            </a:r>
+            <a:endParaRPr lang="en-US" altLang="en-US" sz="900">
+              <a:solidFill>
+                <a:srgbClr val="000000"/>
+              </a:solidFill>
+              <a:latin typeface="Raleway" pitchFamily="2" charset="77"/>
+              <a:ea typeface="Calibri"/>
+              <a:cs typeface="Calibri"/>
             </a:endParaRPr>
           </a:p>
           <a:p>
-            <a:pPr algn="l">
+            <a:pPr algn="l" hangingPunct="0">
               <a:defRPr sz="1800" b="0" i="0" u="none" strike="noStrike" kern="0" cap="none" spc="0" baseline="0">
                 <a:solidFill>
                   <a:srgbClr val="000000"/>
@@ -6002,43 +6724,39 @@
               </a:defRPr>
             </a:pPr>
             <a:r>
-              <a:rPr lang="en-US" sz="1000" b="1">
+              <a:rPr lang="en-US" altLang="en-US" sz="900">
                 <a:solidFill>
                   <a:srgbClr val="000000"/>
                 </a:solidFill>
-                <a:latin typeface="Raleway"/>
+                <a:latin typeface="Raleway" pitchFamily="2" charset="77"/>
                 <a:ea typeface="Calibri"/>
                 <a:cs typeface="Calibri"/>
               </a:rPr>
-              <a:t>Secondary long-tail &gt;&gt;</a:t>
-            </a:r>
-            <a:r>
-              <a:rPr lang="en-US" sz="1000">
+              <a:t> </a:t>
+            </a:r>
+            <a:r>
+              <a:rPr lang="en-US" altLang="en-US" sz="900" b="1">
                 <a:solidFill>
                   <a:srgbClr val="000000"/>
                 </a:solidFill>
-                <a:latin typeface="Raleway"/>
+                <a:latin typeface="Raleway" pitchFamily="2" charset="77"/>
                 <a:ea typeface="Calibri"/>
                 <a:cs typeface="Calibri"/>
               </a:rPr>
-              <a:t>“Econet online shop for accessories Zimbabwe”, “Phones Econet online”, “Econet online store iPhone Samsung”</a:t>
-            </a:r>
-            <a:endParaRPr lang="en-US" sz="1000">
-              <a:latin typeface="Raleway"/>
-            </a:endParaRPr>
-          </a:p>
-          <a:p>
-            <a:pPr marL="228600" indent="-228600">
-              <a:buFont typeface="Arial"/>
-              <a:buChar char="•"/>
-              <a:defRPr sz="1800" b="0" i="0" u="none" strike="noStrike" kern="0" cap="none" spc="0" baseline="0">
+              <a:t>Secondary long-tail &gt;&gt; </a:t>
+            </a:r>
+            <a:r>
+              <a:rPr lang="en-US" altLang="en-US" sz="900">
                 <a:solidFill>
                   <a:srgbClr val="000000"/>
                 </a:solidFill>
-                <a:uFillTx/>
-              </a:defRPr>
-            </a:pPr>
-            <a:endParaRPr lang="en-US" sz="1000">
+                <a:latin typeface="Raleway" pitchFamily="2" charset="77"/>
+                <a:ea typeface="Calibri"/>
+                <a:cs typeface="Calibri"/>
+              </a:rPr>
+              <a:t>Shop 5G-ready phones on Econet, Buy home Wi-Fi routers through Econet, Explore Econet device and accessory offers</a:t>
+            </a:r>
+            <a:endParaRPr lang="en-US" altLang="en-US" sz="900">
               <a:solidFill>
                 <a:srgbClr val="000000"/>
               </a:solidFill>
@@ -6097,7 +6815,7 @@
           <a:p>
             <a:endParaRPr>
               <a:latin typeface="Raleway" pitchFamily="2" charset="77"/>
-              <a:cs typeface="Times New Roman"/>
+              <a:cs typeface="Times New Roman" panose="02020603050405020304"/>
             </a:endParaRPr>
           </a:p>
         </p:txBody>
@@ -6470,7 +7188,528 @@
       </a:bgFillStyleLst>
     </a:fmtScheme>
   </a:themeElements>
-  <a:objectDefaults/>
-  <a:extraClrSchemeLst/>
+  <a:extLst>
+    <a:ext uri="{05A4C25C-085E-4340-85A3-A5531E510DB2}">
+      <thm15:themeFamily xmlns:thm15="http://schemas.microsoft.com/office/thememl/2012/main" name="Office Theme" id="{62F939B6-93AF-4DB8-9C6B-D6C7DFDC589F}" vid="{4A3C46E8-61CC-4603-A589-7422A47A8E4A}"/>
+    </a:ext>
+  </a:extLst>
+</a:theme>
+</file>
+
+<file path=ppt/theme/theme2.xml><?xml version="1.0" encoding="utf-8"?>
+<a:theme xmlns:a="http://schemas.openxmlformats.org/drawingml/2006/main" name="Office Theme">
+  <a:themeElements>
+    <a:clrScheme name="Office">
+      <a:dk1>
+        <a:sysClr val="windowText" lastClr="000000"/>
+      </a:dk1>
+      <a:lt1>
+        <a:sysClr val="window" lastClr="FFFFFF"/>
+      </a:lt1>
+      <a:dk2>
+        <a:srgbClr val="44546A"/>
+      </a:dk2>
+      <a:lt2>
+        <a:srgbClr val="E7E6E6"/>
+      </a:lt2>
+      <a:accent1>
+        <a:srgbClr val="5B9BD5"/>
+      </a:accent1>
+      <a:accent2>
+        <a:srgbClr val="ED7D31"/>
+      </a:accent2>
+      <a:accent3>
+        <a:srgbClr val="A5A5A5"/>
+      </a:accent3>
+      <a:accent4>
+        <a:srgbClr val="FFC000"/>
+      </a:accent4>
+      <a:accent5>
+        <a:srgbClr val="4472C4"/>
+      </a:accent5>
+      <a:accent6>
+        <a:srgbClr val="70AD47"/>
+      </a:accent6>
+      <a:hlink>
+        <a:srgbClr val="0563C1"/>
+      </a:hlink>
+      <a:folHlink>
+        <a:srgbClr val="954F72"/>
+      </a:folHlink>
+    </a:clrScheme>
+    <a:fontScheme name="Office">
+      <a:majorFont>
+        <a:latin typeface="Calibri Light"/>
+        <a:ea typeface=""/>
+        <a:cs typeface=""/>
+        <a:font script="Jpan" typeface="ＭＳ Ｐゴシック"/>
+        <a:font script="Hang" typeface="맑은 고딕"/>
+        <a:font script="Hans" typeface="宋体"/>
+        <a:font script="Hant" typeface="新細明體"/>
+        <a:font script="Arab" typeface="Times New Roman"/>
+        <a:font script="Hebr" typeface="Times New Roman"/>
+        <a:font script="Thai" typeface="Angsana New"/>
+        <a:font script="Ethi" typeface="Nyala"/>
+        <a:font script="Beng" typeface="Vrinda"/>
+        <a:font script="Gujr" typeface="Shruti"/>
+        <a:font script="Khmr" typeface="MoolBoran"/>
+        <a:font script="Knda" typeface="Tunga"/>
+        <a:font script="Guru" typeface="Raavi"/>
+        <a:font script="Cans" typeface="Euphemia"/>
+        <a:font script="Cher" typeface="Plantagenet Cherokee"/>
+        <a:font script="Yiii" typeface="Microsoft Yi Baiti"/>
+        <a:font script="Tibt" typeface="Microsoft Himalaya"/>
+        <a:font script="Thaa" typeface="MV Boli"/>
+        <a:font script="Deva" typeface="Mangal"/>
+        <a:font script="Telu" typeface="Gautami"/>
+        <a:font script="Taml" typeface="Latha"/>
+        <a:font script="Syrc" typeface="Estrangelo Edessa"/>
+        <a:font script="Orya" typeface="Kalinga"/>
+        <a:font script="Mlym" typeface="Kartika"/>
+        <a:font script="Laoo" typeface="DokChampa"/>
+        <a:font script="Sinh" typeface="Iskoola Pota"/>
+        <a:font script="Mong" typeface="Mongolian Baiti"/>
+        <a:font script="Viet" typeface="Times New Roman"/>
+        <a:font script="Uigh" typeface="Microsoft Uighur"/>
+        <a:font script="Geor" typeface="Sylfaen"/>
+      </a:majorFont>
+      <a:minorFont>
+        <a:latin typeface="Calibri"/>
+        <a:ea typeface=""/>
+        <a:cs typeface=""/>
+        <a:font script="Jpan" typeface="ＭＳ Ｐゴシック"/>
+        <a:font script="Hang" typeface="맑은 고딕"/>
+        <a:font script="Hans" typeface="宋体"/>
+        <a:font script="Hant" typeface="新細明體"/>
+        <a:font script="Arab" typeface="Arial"/>
+        <a:font script="Hebr" typeface="Arial"/>
+        <a:font script="Thai" typeface="Cordia New"/>
+        <a:font script="Ethi" typeface="Nyala"/>
+        <a:font script="Beng" typeface="Vrinda"/>
+        <a:font script="Gujr" typeface="Shruti"/>
+        <a:font script="Khmr" typeface="DaunPenh"/>
+        <a:font script="Knda" typeface="Tunga"/>
+        <a:font script="Guru" typeface="Raavi"/>
+        <a:font script="Cans" typeface="Euphemia"/>
+        <a:font script="Cher" typeface="Plantagenet Cherokee"/>
+        <a:font script="Yiii" typeface="Microsoft Yi Baiti"/>
+        <a:font script="Tibt" typeface="Microsoft Himalaya"/>
+        <a:font script="Thaa" typeface="MV Boli"/>
+        <a:font script="Deva" typeface="Mangal"/>
+        <a:font script="Telu" typeface="Gautami"/>
+        <a:font script="Taml" typeface="Latha"/>
+        <a:font script="Syrc" typeface="Estrangelo Edessa"/>
+        <a:font script="Orya" typeface="Kalinga"/>
+        <a:font script="Mlym" typeface="Kartika"/>
+        <a:font script="Laoo" typeface="DokChampa"/>
+        <a:font script="Sinh" typeface="Iskoola Pota"/>
+        <a:font script="Mong" typeface="Mongolian Baiti"/>
+        <a:font script="Viet" typeface="Arial"/>
+        <a:font script="Uigh" typeface="Microsoft Uighur"/>
+        <a:font script="Geor" typeface="Sylfaen"/>
+      </a:minorFont>
+    </a:fontScheme>
+    <a:fmtScheme name="Office">
+      <a:fillStyleLst>
+        <a:solidFill>
+          <a:schemeClr val="phClr"/>
+        </a:solidFill>
+        <a:gradFill rotWithShape="1">
+          <a:gsLst>
+            <a:gs pos="0">
+              <a:schemeClr val="phClr">
+                <a:lumMod val="110000"/>
+                <a:satMod val="105000"/>
+                <a:tint val="67000"/>
+              </a:schemeClr>
+            </a:gs>
+            <a:gs pos="50000">
+              <a:schemeClr val="phClr">
+                <a:lumMod val="105000"/>
+                <a:satMod val="103000"/>
+                <a:tint val="73000"/>
+              </a:schemeClr>
+            </a:gs>
+            <a:gs pos="100000">
+              <a:schemeClr val="phClr">
+                <a:lumMod val="105000"/>
+                <a:satMod val="109000"/>
+                <a:tint val="81000"/>
+              </a:schemeClr>
+            </a:gs>
+          </a:gsLst>
+          <a:lin ang="5400000" scaled="0"/>
+        </a:gradFill>
+        <a:gradFill rotWithShape="1">
+          <a:gsLst>
+            <a:gs pos="0">
+              <a:schemeClr val="phClr">
+                <a:satMod val="103000"/>
+                <a:lumMod val="102000"/>
+                <a:tint val="94000"/>
+              </a:schemeClr>
+            </a:gs>
+            <a:gs pos="50000">
+              <a:schemeClr val="phClr">
+                <a:satMod val="110000"/>
+                <a:lumMod val="100000"/>
+                <a:shade val="100000"/>
+              </a:schemeClr>
+            </a:gs>
+            <a:gs pos="100000">
+              <a:schemeClr val="phClr">
+                <a:lumMod val="99000"/>
+                <a:satMod val="120000"/>
+                <a:shade val="78000"/>
+              </a:schemeClr>
+            </a:gs>
+          </a:gsLst>
+          <a:lin ang="5400000" scaled="0"/>
+        </a:gradFill>
+      </a:fillStyleLst>
+      <a:lnStyleLst>
+        <a:ln w="6350" cap="flat" cmpd="sng" algn="ctr">
+          <a:solidFill>
+            <a:schemeClr val="phClr"/>
+          </a:solidFill>
+          <a:prstDash val="solid"/>
+          <a:miter lim="800000"/>
+        </a:ln>
+        <a:ln w="12700" cap="flat" cmpd="sng" algn="ctr">
+          <a:solidFill>
+            <a:schemeClr val="phClr"/>
+          </a:solidFill>
+          <a:prstDash val="solid"/>
+          <a:miter lim="800000"/>
+        </a:ln>
+        <a:ln w="19050" cap="flat" cmpd="sng" algn="ctr">
+          <a:solidFill>
+            <a:schemeClr val="phClr"/>
+          </a:solidFill>
+          <a:prstDash val="solid"/>
+          <a:miter lim="800000"/>
+        </a:ln>
+      </a:lnStyleLst>
+      <a:effectStyleLst>
+        <a:effectStyle>
+          <a:effectLst/>
+        </a:effectStyle>
+        <a:effectStyle>
+          <a:effectLst/>
+        </a:effectStyle>
+        <a:effectStyle>
+          <a:effectLst>
+            <a:outerShdw blurRad="57150" dist="19050" dir="5400000" algn="ctr" rotWithShape="0">
+              <a:srgbClr val="000000">
+                <a:alpha val="63000"/>
+              </a:srgbClr>
+            </a:outerShdw>
+          </a:effectLst>
+        </a:effectStyle>
+      </a:effectStyleLst>
+      <a:bgFillStyleLst>
+        <a:solidFill>
+          <a:schemeClr val="phClr"/>
+        </a:solidFill>
+        <a:solidFill>
+          <a:schemeClr val="phClr">
+            <a:tint val="95000"/>
+            <a:satMod val="170000"/>
+          </a:schemeClr>
+        </a:solidFill>
+        <a:gradFill rotWithShape="1">
+          <a:gsLst>
+            <a:gs pos="0">
+              <a:schemeClr val="phClr">
+                <a:tint val="93000"/>
+                <a:satMod val="150000"/>
+                <a:shade val="98000"/>
+                <a:lumMod val="102000"/>
+              </a:schemeClr>
+            </a:gs>
+            <a:gs pos="50000">
+              <a:schemeClr val="phClr">
+                <a:tint val="98000"/>
+                <a:satMod val="130000"/>
+                <a:shade val="90000"/>
+                <a:lumMod val="103000"/>
+              </a:schemeClr>
+            </a:gs>
+            <a:gs pos="100000">
+              <a:schemeClr val="phClr">
+                <a:shade val="63000"/>
+                <a:satMod val="120000"/>
+              </a:schemeClr>
+            </a:gs>
+          </a:gsLst>
+          <a:lin ang="5400000" scaled="0"/>
+        </a:gradFill>
+      </a:bgFillStyleLst>
+    </a:fmtScheme>
+  </a:themeElements>
+  <a:extLst>
+    <a:ext uri="{05A4C25C-085E-4340-85A3-A5531E510DB2}">
+      <thm15:themeFamily xmlns:thm15="http://schemas.microsoft.com/office/thememl/2012/main" name="Office Theme" id="{62F939B6-93AF-4DB8-9C6B-D6C7DFDC589F}" vid="{4A3C46E8-61CC-4603-A589-7422A47A8E4A}"/>
+    </a:ext>
+  </a:extLst>
+</a:theme>
+</file>
+
+<file path=ppt/theme/theme3.xml><?xml version="1.0" encoding="utf-8"?>
+<a:theme xmlns:a="http://schemas.openxmlformats.org/drawingml/2006/main" name="Office Theme">
+  <a:themeElements>
+    <a:clrScheme name="Office">
+      <a:dk1>
+        <a:sysClr val="windowText" lastClr="000000"/>
+      </a:dk1>
+      <a:lt1>
+        <a:sysClr val="window" lastClr="FFFFFF"/>
+      </a:lt1>
+      <a:dk2>
+        <a:srgbClr val="44546A"/>
+      </a:dk2>
+      <a:lt2>
+        <a:srgbClr val="E7E6E6"/>
+      </a:lt2>
+      <a:accent1>
+        <a:srgbClr val="5B9BD5"/>
+      </a:accent1>
+      <a:accent2>
+        <a:srgbClr val="ED7D31"/>
+      </a:accent2>
+      <a:accent3>
+        <a:srgbClr val="A5A5A5"/>
+      </a:accent3>
+      <a:accent4>
+        <a:srgbClr val="FFC000"/>
+      </a:accent4>
+      <a:accent5>
+        <a:srgbClr val="4472C4"/>
+      </a:accent5>
+      <a:accent6>
+        <a:srgbClr val="70AD47"/>
+      </a:accent6>
+      <a:hlink>
+        <a:srgbClr val="0563C1"/>
+      </a:hlink>
+      <a:folHlink>
+        <a:srgbClr val="954F72"/>
+      </a:folHlink>
+    </a:clrScheme>
+    <a:fontScheme name="Office">
+      <a:majorFont>
+        <a:latin typeface="Calibri Light"/>
+        <a:ea typeface=""/>
+        <a:cs typeface=""/>
+        <a:font script="Jpan" typeface="ＭＳ Ｐゴシック"/>
+        <a:font script="Hang" typeface="맑은 고딕"/>
+        <a:font script="Hans" typeface="宋体"/>
+        <a:font script="Hant" typeface="新細明體"/>
+        <a:font script="Arab" typeface="Times New Roman"/>
+        <a:font script="Hebr" typeface="Times New Roman"/>
+        <a:font script="Thai" typeface="Angsana New"/>
+        <a:font script="Ethi" typeface="Nyala"/>
+        <a:font script="Beng" typeface="Vrinda"/>
+        <a:font script="Gujr" typeface="Shruti"/>
+        <a:font script="Khmr" typeface="MoolBoran"/>
+        <a:font script="Knda" typeface="Tunga"/>
+        <a:font script="Guru" typeface="Raavi"/>
+        <a:font script="Cans" typeface="Euphemia"/>
+        <a:font script="Cher" typeface="Plantagenet Cherokee"/>
+        <a:font script="Yiii" typeface="Microsoft Yi Baiti"/>
+        <a:font script="Tibt" typeface="Microsoft Himalaya"/>
+        <a:font script="Thaa" typeface="MV Boli"/>
+        <a:font script="Deva" typeface="Mangal"/>
+        <a:font script="Telu" typeface="Gautami"/>
+        <a:font script="Taml" typeface="Latha"/>
+        <a:font script="Syrc" typeface="Estrangelo Edessa"/>
+        <a:font script="Orya" typeface="Kalinga"/>
+        <a:font script="Mlym" typeface="Kartika"/>
+        <a:font script="Laoo" typeface="DokChampa"/>
+        <a:font script="Sinh" typeface="Iskoola Pota"/>
+        <a:font script="Mong" typeface="Mongolian Baiti"/>
+        <a:font script="Viet" typeface="Times New Roman"/>
+        <a:font script="Uigh" typeface="Microsoft Uighur"/>
+        <a:font script="Geor" typeface="Sylfaen"/>
+      </a:majorFont>
+      <a:minorFont>
+        <a:latin typeface="Calibri"/>
+        <a:ea typeface=""/>
+        <a:cs typeface=""/>
+        <a:font script="Jpan" typeface="ＭＳ Ｐゴシック"/>
+        <a:font script="Hang" typeface="맑은 고딕"/>
+        <a:font script="Hans" typeface="宋体"/>
+        <a:font script="Hant" typeface="新細明體"/>
+        <a:font script="Arab" typeface="Arial"/>
+        <a:font script="Hebr" typeface="Arial"/>
+        <a:font script="Thai" typeface="Cordia New"/>
+        <a:font script="Ethi" typeface="Nyala"/>
+        <a:font script="Beng" typeface="Vrinda"/>
+        <a:font script="Gujr" typeface="Shruti"/>
+        <a:font script="Khmr" typeface="DaunPenh"/>
+        <a:font script="Knda" typeface="Tunga"/>
+        <a:font script="Guru" typeface="Raavi"/>
+        <a:font script="Cans" typeface="Euphemia"/>
+        <a:font script="Cher" typeface="Plantagenet Cherokee"/>
+        <a:font script="Yiii" typeface="Microsoft Yi Baiti"/>
+        <a:font script="Tibt" typeface="Microsoft Himalaya"/>
+        <a:font script="Thaa" typeface="MV Boli"/>
+        <a:font script="Deva" typeface="Mangal"/>
+        <a:font script="Telu" typeface="Gautami"/>
+        <a:font script="Taml" typeface="Latha"/>
+        <a:font script="Syrc" typeface="Estrangelo Edessa"/>
+        <a:font script="Orya" typeface="Kalinga"/>
+        <a:font script="Mlym" typeface="Kartika"/>
+        <a:font script="Laoo" typeface="DokChampa"/>
+        <a:font script="Sinh" typeface="Iskoola Pota"/>
+        <a:font script="Mong" typeface="Mongolian Baiti"/>
+        <a:font script="Viet" typeface="Arial"/>
+        <a:font script="Uigh" typeface="Microsoft Uighur"/>
+        <a:font script="Geor" typeface="Sylfaen"/>
+      </a:minorFont>
+    </a:fontScheme>
+    <a:fmtScheme name="Office">
+      <a:fillStyleLst>
+        <a:solidFill>
+          <a:schemeClr val="phClr"/>
+        </a:solidFill>
+        <a:gradFill rotWithShape="1">
+          <a:gsLst>
+            <a:gs pos="0">
+              <a:schemeClr val="phClr">
+                <a:lumMod val="110000"/>
+                <a:satMod val="105000"/>
+                <a:tint val="67000"/>
+              </a:schemeClr>
+            </a:gs>
+            <a:gs pos="50000">
+              <a:schemeClr val="phClr">
+                <a:lumMod val="105000"/>
+                <a:satMod val="103000"/>
+                <a:tint val="73000"/>
+              </a:schemeClr>
+            </a:gs>
+            <a:gs pos="100000">
+              <a:schemeClr val="phClr">
+                <a:lumMod val="105000"/>
+                <a:satMod val="109000"/>
+                <a:tint val="81000"/>
+              </a:schemeClr>
+            </a:gs>
+          </a:gsLst>
+          <a:lin ang="5400000" scaled="0"/>
+        </a:gradFill>
+        <a:gradFill rotWithShape="1">
+          <a:gsLst>
+            <a:gs pos="0">
+              <a:schemeClr val="phClr">
+                <a:satMod val="103000"/>
+                <a:lumMod val="102000"/>
+                <a:tint val="94000"/>
+              </a:schemeClr>
+            </a:gs>
+            <a:gs pos="50000">
+              <a:schemeClr val="phClr">
+                <a:satMod val="110000"/>
+                <a:lumMod val="100000"/>
+                <a:shade val="100000"/>
+              </a:schemeClr>
+            </a:gs>
+            <a:gs pos="100000">
+              <a:schemeClr val="phClr">
+                <a:lumMod val="99000"/>
+                <a:satMod val="120000"/>
+                <a:shade val="78000"/>
+              </a:schemeClr>
+            </a:gs>
+          </a:gsLst>
+          <a:lin ang="5400000" scaled="0"/>
+        </a:gradFill>
+      </a:fillStyleLst>
+      <a:lnStyleLst>
+        <a:ln w="6350" cap="flat" cmpd="sng" algn="ctr">
+          <a:solidFill>
+            <a:schemeClr val="phClr"/>
+          </a:solidFill>
+          <a:prstDash val="solid"/>
+          <a:miter lim="800000"/>
+        </a:ln>
+        <a:ln w="12700" cap="flat" cmpd="sng" algn="ctr">
+          <a:solidFill>
+            <a:schemeClr val="phClr"/>
+          </a:solidFill>
+          <a:prstDash val="solid"/>
+          <a:miter lim="800000"/>
+        </a:ln>
+        <a:ln w="19050" cap="flat" cmpd="sng" algn="ctr">
+          <a:solidFill>
+            <a:schemeClr val="phClr"/>
+          </a:solidFill>
+          <a:prstDash val="solid"/>
+          <a:miter lim="800000"/>
+        </a:ln>
+      </a:lnStyleLst>
+      <a:effectStyleLst>
+        <a:effectStyle>
+          <a:effectLst/>
+        </a:effectStyle>
+        <a:effectStyle>
+          <a:effectLst/>
+        </a:effectStyle>
+        <a:effectStyle>
+          <a:effectLst>
+            <a:outerShdw blurRad="57150" dist="19050" dir="5400000" algn="ctr" rotWithShape="0">
+              <a:srgbClr val="000000">
+                <a:alpha val="63000"/>
+              </a:srgbClr>
+            </a:outerShdw>
+          </a:effectLst>
+        </a:effectStyle>
+      </a:effectStyleLst>
+      <a:bgFillStyleLst>
+        <a:solidFill>
+          <a:schemeClr val="phClr"/>
+        </a:solidFill>
+        <a:solidFill>
+          <a:schemeClr val="phClr">
+            <a:tint val="95000"/>
+            <a:satMod val="170000"/>
+          </a:schemeClr>
+        </a:solidFill>
+        <a:gradFill rotWithShape="1">
+          <a:gsLst>
+            <a:gs pos="0">
+              <a:schemeClr val="phClr">
+                <a:tint val="93000"/>
+                <a:satMod val="150000"/>
+                <a:shade val="98000"/>
+                <a:lumMod val="102000"/>
+              </a:schemeClr>
+            </a:gs>
+            <a:gs pos="50000">
+              <a:schemeClr val="phClr">
+                <a:tint val="98000"/>
+                <a:satMod val="130000"/>
+                <a:shade val="90000"/>
+                <a:lumMod val="103000"/>
+              </a:schemeClr>
+            </a:gs>
+            <a:gs pos="100000">
+              <a:schemeClr val="phClr">
+                <a:shade val="63000"/>
+                <a:satMod val="120000"/>
+              </a:schemeClr>
+            </a:gs>
+          </a:gsLst>
+          <a:lin ang="5400000" scaled="0"/>
+        </a:gradFill>
+      </a:bgFillStyleLst>
+    </a:fmtScheme>
+  </a:themeElements>
+  <a:extLst>
+    <a:ext uri="{05A4C25C-085E-4340-85A3-A5531E510DB2}">
+      <thm15:themeFamily xmlns:thm15="http://schemas.microsoft.com/office/thememl/2012/main" name="Office Theme" id="{62F939B6-93AF-4DB8-9C6B-D6C7DFDC589F}" vid="{4A3C46E8-61CC-4603-A589-7422A47A8E4A}"/>
+    </a:ext>
+  </a:extLst>
 </a:theme>
 </file>